--- a/ClassMaterial/1차 프로젝트/4. 화면설계/4._화면_설계서(김현규)ver-1.pptx
+++ b/ClassMaterial/1차 프로젝트/4. 화면설계/4._화면_설계서(김현규)ver-1.pptx
@@ -12,8 +12,9 @@
     <p:sldId id="268" r:id="rId6"/>
     <p:sldId id="265" r:id="rId7"/>
     <p:sldId id="263" r:id="rId8"/>
-    <p:sldId id="264" r:id="rId9"/>
-    <p:sldId id="266" r:id="rId10"/>
+    <p:sldId id="269" r:id="rId9"/>
+    <p:sldId id="264" r:id="rId10"/>
+    <p:sldId id="266" r:id="rId11"/>
   </p:sldIdLst>
   <p:sldSz cx="12192000" cy="6858000"/>
   <p:notesSz cx="6858000" cy="9144000"/>
@@ -267,7 +268,7 @@
           <a:p>
             <a:fld id="{96E2DBC7-E752-4E4F-8B3C-84FCBF39FA17}" type="datetimeFigureOut">
               <a:rPr lang="ko-KR" altLang="en-US" smtClean="0"/>
-              <a:t>2026-03-22</a:t>
+              <a:t>2026-03-23</a:t>
             </a:fld>
             <a:endParaRPr lang="ko-KR" altLang="en-US"/>
           </a:p>
@@ -465,7 +466,7 @@
           <a:p>
             <a:fld id="{96E2DBC7-E752-4E4F-8B3C-84FCBF39FA17}" type="datetimeFigureOut">
               <a:rPr lang="ko-KR" altLang="en-US" smtClean="0"/>
-              <a:t>2026-03-22</a:t>
+              <a:t>2026-03-23</a:t>
             </a:fld>
             <a:endParaRPr lang="ko-KR" altLang="en-US"/>
           </a:p>
@@ -673,7 +674,7 @@
           <a:p>
             <a:fld id="{96E2DBC7-E752-4E4F-8B3C-84FCBF39FA17}" type="datetimeFigureOut">
               <a:rPr lang="ko-KR" altLang="en-US" smtClean="0"/>
-              <a:t>2026-03-22</a:t>
+              <a:t>2026-03-23</a:t>
             </a:fld>
             <a:endParaRPr lang="ko-KR" altLang="en-US"/>
           </a:p>
@@ -871,7 +872,7 @@
           <a:p>
             <a:fld id="{96E2DBC7-E752-4E4F-8B3C-84FCBF39FA17}" type="datetimeFigureOut">
               <a:rPr lang="ko-KR" altLang="en-US" smtClean="0"/>
-              <a:t>2026-03-22</a:t>
+              <a:t>2026-03-23</a:t>
             </a:fld>
             <a:endParaRPr lang="ko-KR" altLang="en-US"/>
           </a:p>
@@ -1146,7 +1147,7 @@
           <a:p>
             <a:fld id="{96E2DBC7-E752-4E4F-8B3C-84FCBF39FA17}" type="datetimeFigureOut">
               <a:rPr lang="ko-KR" altLang="en-US" smtClean="0"/>
-              <a:t>2026-03-22</a:t>
+              <a:t>2026-03-23</a:t>
             </a:fld>
             <a:endParaRPr lang="ko-KR" altLang="en-US"/>
           </a:p>
@@ -1411,7 +1412,7 @@
           <a:p>
             <a:fld id="{96E2DBC7-E752-4E4F-8B3C-84FCBF39FA17}" type="datetimeFigureOut">
               <a:rPr lang="ko-KR" altLang="en-US" smtClean="0"/>
-              <a:t>2026-03-22</a:t>
+              <a:t>2026-03-23</a:t>
             </a:fld>
             <a:endParaRPr lang="ko-KR" altLang="en-US"/>
           </a:p>
@@ -1823,7 +1824,7 @@
           <a:p>
             <a:fld id="{96E2DBC7-E752-4E4F-8B3C-84FCBF39FA17}" type="datetimeFigureOut">
               <a:rPr lang="ko-KR" altLang="en-US" smtClean="0"/>
-              <a:t>2026-03-22</a:t>
+              <a:t>2026-03-23</a:t>
             </a:fld>
             <a:endParaRPr lang="ko-KR" altLang="en-US"/>
           </a:p>
@@ -1964,7 +1965,7 @@
           <a:p>
             <a:fld id="{96E2DBC7-E752-4E4F-8B3C-84FCBF39FA17}" type="datetimeFigureOut">
               <a:rPr lang="ko-KR" altLang="en-US" smtClean="0"/>
-              <a:t>2026-03-22</a:t>
+              <a:t>2026-03-23</a:t>
             </a:fld>
             <a:endParaRPr lang="ko-KR" altLang="en-US"/>
           </a:p>
@@ -2077,7 +2078,7 @@
           <a:p>
             <a:fld id="{96E2DBC7-E752-4E4F-8B3C-84FCBF39FA17}" type="datetimeFigureOut">
               <a:rPr lang="ko-KR" altLang="en-US" smtClean="0"/>
-              <a:t>2026-03-22</a:t>
+              <a:t>2026-03-23</a:t>
             </a:fld>
             <a:endParaRPr lang="ko-KR" altLang="en-US"/>
           </a:p>
@@ -2388,7 +2389,7 @@
           <a:p>
             <a:fld id="{96E2DBC7-E752-4E4F-8B3C-84FCBF39FA17}" type="datetimeFigureOut">
               <a:rPr lang="ko-KR" altLang="en-US" smtClean="0"/>
-              <a:t>2026-03-22</a:t>
+              <a:t>2026-03-23</a:t>
             </a:fld>
             <a:endParaRPr lang="ko-KR" altLang="en-US"/>
           </a:p>
@@ -2676,7 +2677,7 @@
           <a:p>
             <a:fld id="{96E2DBC7-E752-4E4F-8B3C-84FCBF39FA17}" type="datetimeFigureOut">
               <a:rPr lang="ko-KR" altLang="en-US" smtClean="0"/>
-              <a:t>2026-03-22</a:t>
+              <a:t>2026-03-23</a:t>
             </a:fld>
             <a:endParaRPr lang="ko-KR" altLang="en-US"/>
           </a:p>
@@ -2920,7 +2921,7 @@
           <a:p>
             <a:fld id="{96E2DBC7-E752-4E4F-8B3C-84FCBF39FA17}" type="datetimeFigureOut">
               <a:rPr lang="ko-KR" altLang="en-US" smtClean="0"/>
-              <a:t>2026-03-22</a:t>
+              <a:t>2026-03-23</a:t>
             </a:fld>
             <a:endParaRPr lang="ko-KR" altLang="en-US"/>
           </a:p>
@@ -3388,12 +3389,20 @@
           <a:p>
             <a:pPr algn="ctr"/>
             <a:r>
-              <a:rPr lang="ko-KR" altLang="en-US" dirty="0" err="1">
+              <a:rPr lang="en-US" altLang="ko-KR" dirty="0" smtClean="0">
                 <a:solidFill>
                   <a:schemeClr val="tx1"/>
                 </a:solidFill>
               </a:rPr>
-              <a:t>프로젝트명</a:t>
+              <a:t>PHC </a:t>
+            </a:r>
+            <a:r>
+              <a:rPr lang="ko-KR" altLang="en-US" dirty="0" smtClean="0">
+                <a:solidFill>
+                  <a:schemeClr val="tx1"/>
+                </a:solidFill>
+              </a:rPr>
+              <a:t>감시단</a:t>
             </a:r>
             <a:endParaRPr lang="ko-KR" altLang="en-US" dirty="0">
               <a:solidFill>
@@ -3418,7 +3427,7 @@
           <p:nvPr>
             <p:extLst>
               <p:ext uri="{D42A27DB-BD31-4B8C-83A1-F6EECF244321}">
-                <p14:modId xmlns:p14="http://schemas.microsoft.com/office/powerpoint/2010/main" val="626865841"/>
+                <p14:modId xmlns:p14="http://schemas.microsoft.com/office/powerpoint/2010/main" val="1901794631"/>
               </p:ext>
             </p:extLst>
           </p:nvPr>
@@ -3502,6 +3511,10 @@
                     <a:lstStyle/>
                     <a:p>
                       <a:pPr latinLnBrk="1"/>
+                      <a:r>
+                        <a:rPr lang="en-US" altLang="ko-KR" dirty="0" smtClean="0"/>
+                        <a:t>2026.03.23</a:t>
+                      </a:r>
                       <a:endParaRPr lang="ko-KR" altLang="en-US" dirty="0"/>
                     </a:p>
                   </a:txBody>
@@ -3534,6 +3547,10 @@
                     <a:lstStyle/>
                     <a:p>
                       <a:pPr latinLnBrk="1"/>
+                      <a:r>
+                        <a:rPr lang="en-US" altLang="ko-KR" dirty="0" smtClean="0"/>
+                        <a:t>5Drone</a:t>
+                      </a:r>
                       <a:endParaRPr lang="ko-KR" altLang="en-US" dirty="0"/>
                     </a:p>
                   </a:txBody>
@@ -3591,6 +3608,657 @@
   <p:clrMapOvr>
     <a:masterClrMapping/>
   </p:clrMapOvr>
+  <p:timing>
+    <p:tnLst>
+      <p:par>
+        <p:cTn id="1" dur="indefinite" restart="never" nodeType="tmRoot"/>
+      </p:par>
+    </p:tnLst>
+  </p:timing>
+</p:sld>
+</file>
+
+<file path=ppt/slides/slide10.xml><?xml version="1.0" encoding="utf-8"?>
+<p:sld xmlns:a="http://schemas.openxmlformats.org/drawingml/2006/main" xmlns:r="http://schemas.openxmlformats.org/officeDocument/2006/relationships" xmlns:p="http://schemas.openxmlformats.org/presentationml/2006/main">
+  <p:cSld>
+    <p:spTree>
+      <p:nvGrpSpPr>
+        <p:cNvPr id="1" name=""/>
+        <p:cNvGrpSpPr/>
+        <p:nvPr/>
+      </p:nvGrpSpPr>
+      <p:grpSpPr>
+        <a:xfrm>
+          <a:off x="0" y="0"/>
+          <a:ext cx="0" cy="0"/>
+          <a:chOff x="0" y="0"/>
+          <a:chExt cx="0" cy="0"/>
+        </a:xfrm>
+      </p:grpSpPr>
+      <p:graphicFrame>
+        <p:nvGraphicFramePr>
+          <p:cNvPr id="5" name="표 4">
+            <a:extLst>
+              <a:ext uri="{FF2B5EF4-FFF2-40B4-BE49-F238E27FC236}">
+                <a16:creationId xmlns:a16="http://schemas.microsoft.com/office/drawing/2014/main" id="{44D6DE18-1C9C-43CB-82E9-B019349A75C2}"/>
+              </a:ext>
+            </a:extLst>
+          </p:cNvPr>
+          <p:cNvGraphicFramePr>
+            <a:graphicFrameLocks noGrp="1"/>
+          </p:cNvGraphicFramePr>
+          <p:nvPr>
+            <p:extLst>
+              <p:ext uri="{D42A27DB-BD31-4B8C-83A1-F6EECF244321}">
+                <p14:modId xmlns:p14="http://schemas.microsoft.com/office/powerpoint/2010/main" val="2613997660"/>
+              </p:ext>
+            </p:extLst>
+          </p:nvPr>
+        </p:nvGraphicFramePr>
+        <p:xfrm>
+          <a:off x="1411288" y="1660107"/>
+          <a:ext cx="9369424" cy="2842428"/>
+        </p:xfrm>
+        <a:graphic>
+          <a:graphicData uri="http://schemas.openxmlformats.org/drawingml/2006/table">
+            <a:tbl>
+              <a:tblPr firstRow="1" bandRow="1">
+                <a:tableStyleId>{5C22544A-7EE6-4342-B048-85BDC9FD1C3A}</a:tableStyleId>
+              </a:tblPr>
+              <a:tblGrid>
+                <a:gridCol w="2342356">
+                  <a:extLst>
+                    <a:ext uri="{9D8B030D-6E8A-4147-A177-3AD203B41FA5}">
+                      <a16:colId xmlns:a16="http://schemas.microsoft.com/office/drawing/2014/main" val="574304036"/>
+                    </a:ext>
+                  </a:extLst>
+                </a:gridCol>
+                <a:gridCol w="2342356">
+                  <a:extLst>
+                    <a:ext uri="{9D8B030D-6E8A-4147-A177-3AD203B41FA5}">
+                      <a16:colId xmlns:a16="http://schemas.microsoft.com/office/drawing/2014/main" val="537019085"/>
+                    </a:ext>
+                  </a:extLst>
+                </a:gridCol>
+                <a:gridCol w="2342356">
+                  <a:extLst>
+                    <a:ext uri="{9D8B030D-6E8A-4147-A177-3AD203B41FA5}">
+                      <a16:colId xmlns:a16="http://schemas.microsoft.com/office/drawing/2014/main" val="1538042651"/>
+                    </a:ext>
+                  </a:extLst>
+                </a:gridCol>
+                <a:gridCol w="2342356">
+                  <a:extLst>
+                    <a:ext uri="{9D8B030D-6E8A-4147-A177-3AD203B41FA5}">
+                      <a16:colId xmlns:a16="http://schemas.microsoft.com/office/drawing/2014/main" val="2670803437"/>
+                    </a:ext>
+                  </a:extLst>
+                </a:gridCol>
+              </a:tblGrid>
+              <a:tr h="207365">
+                <a:tc>
+                  <a:txBody>
+                    <a:bodyPr/>
+                    <a:lstStyle/>
+                    <a:p>
+                      <a:pPr latinLnBrk="1"/>
+                      <a:r>
+                        <a:rPr lang="ko-KR" altLang="en-US" sz="1400" dirty="0"/>
+                        <a:t>번호</a:t>
+                      </a:r>
+                    </a:p>
+                  </a:txBody>
+                  <a:tcPr/>
+                </a:tc>
+                <a:tc>
+                  <a:txBody>
+                    <a:bodyPr/>
+                    <a:lstStyle/>
+                    <a:p>
+                      <a:pPr latinLnBrk="1"/>
+                      <a:r>
+                        <a:rPr lang="ko-KR" altLang="en-US" sz="1400" dirty="0"/>
+                        <a:t>상황</a:t>
+                      </a:r>
+                    </a:p>
+                  </a:txBody>
+                  <a:tcPr/>
+                </a:tc>
+                <a:tc>
+                  <a:txBody>
+                    <a:bodyPr/>
+                    <a:lstStyle/>
+                    <a:p>
+                      <a:pPr latinLnBrk="1"/>
+                      <a:r>
+                        <a:rPr lang="ko-KR" altLang="en-US" sz="1400" dirty="0"/>
+                        <a:t>문구</a:t>
+                      </a:r>
+                    </a:p>
+                  </a:txBody>
+                  <a:tcPr/>
+                </a:tc>
+                <a:tc>
+                  <a:txBody>
+                    <a:bodyPr/>
+                    <a:lstStyle/>
+                    <a:p>
+                      <a:pPr latinLnBrk="1"/>
+                      <a:r>
+                        <a:rPr lang="ko-KR" altLang="en-US" sz="1400" dirty="0"/>
+                        <a:t>처리 시나리오</a:t>
+                      </a:r>
+                    </a:p>
+                  </a:txBody>
+                  <a:tcPr/>
+                </a:tc>
+                <a:extLst>
+                  <a:ext uri="{0D108BD9-81ED-4DB2-BD59-A6C34878D82A}">
+                    <a16:rowId xmlns:a16="http://schemas.microsoft.com/office/drawing/2014/main" val="4121971312"/>
+                  </a:ext>
+                </a:extLst>
+              </a:tr>
+              <a:tr h="327716">
+                <a:tc>
+                  <a:txBody>
+                    <a:bodyPr/>
+                    <a:lstStyle/>
+                    <a:p>
+                      <a:pPr latinLnBrk="1"/>
+                      <a:r>
+                        <a:rPr lang="en-US" altLang="ko-KR" sz="1400" dirty="0"/>
+                        <a:t>1</a:t>
+                      </a:r>
+                      <a:endParaRPr lang="ko-KR" altLang="en-US" sz="1400" dirty="0"/>
+                    </a:p>
+                  </a:txBody>
+                  <a:tcPr/>
+                </a:tc>
+                <a:tc>
+                  <a:txBody>
+                    <a:bodyPr/>
+                    <a:lstStyle/>
+                    <a:p>
+                      <a:pPr latinLnBrk="1"/>
+                      <a:r>
+                        <a:rPr lang="ko-KR" altLang="en-US" sz="1400" dirty="0" smtClean="0"/>
+                        <a:t>로그인 정보 미 입력</a:t>
+                      </a:r>
+                      <a:endParaRPr lang="ko-KR" altLang="en-US" sz="1400" dirty="0"/>
+                    </a:p>
+                  </a:txBody>
+                  <a:tcPr/>
+                </a:tc>
+                <a:tc>
+                  <a:txBody>
+                    <a:bodyPr/>
+                    <a:lstStyle/>
+                    <a:p>
+                      <a:pPr latinLnBrk="1"/>
+                      <a:r>
+                        <a:rPr lang="en-US" altLang="ko-KR" sz="1400" dirty="0" smtClean="0"/>
+                        <a:t>“</a:t>
+                      </a:r>
+                      <a:endParaRPr lang="ko-KR" altLang="en-US" sz="1400" dirty="0"/>
+                    </a:p>
+                  </a:txBody>
+                  <a:tcPr/>
+                </a:tc>
+                <a:tc>
+                  <a:txBody>
+                    <a:bodyPr/>
+                    <a:lstStyle/>
+                    <a:p>
+                      <a:pPr latinLnBrk="1"/>
+                      <a:endParaRPr lang="ko-KR" altLang="en-US" sz="1400" dirty="0"/>
+                    </a:p>
+                  </a:txBody>
+                  <a:tcPr/>
+                </a:tc>
+                <a:extLst>
+                  <a:ext uri="{0D108BD9-81ED-4DB2-BD59-A6C34878D82A}">
+                    <a16:rowId xmlns:a16="http://schemas.microsoft.com/office/drawing/2014/main" val="4277118500"/>
+                  </a:ext>
+                </a:extLst>
+              </a:tr>
+              <a:tr h="327716">
+                <a:tc>
+                  <a:txBody>
+                    <a:bodyPr/>
+                    <a:lstStyle/>
+                    <a:p>
+                      <a:pPr latinLnBrk="1"/>
+                      <a:r>
+                        <a:rPr lang="en-US" altLang="ko-KR" sz="1400" dirty="0"/>
+                        <a:t>2</a:t>
+                      </a:r>
+                      <a:endParaRPr lang="ko-KR" altLang="en-US" sz="1400" dirty="0"/>
+                    </a:p>
+                  </a:txBody>
+                  <a:tcPr/>
+                </a:tc>
+                <a:tc>
+                  <a:txBody>
+                    <a:bodyPr/>
+                    <a:lstStyle/>
+                    <a:p>
+                      <a:pPr latinLnBrk="1"/>
+                      <a:r>
+                        <a:rPr lang="ko-KR" altLang="en-US" sz="1400" dirty="0" smtClean="0"/>
+                        <a:t>아이디 또는 비번 오류</a:t>
+                      </a:r>
+                      <a:endParaRPr lang="ko-KR" altLang="en-US" sz="1400" dirty="0"/>
+                    </a:p>
+                  </a:txBody>
+                  <a:tcPr/>
+                </a:tc>
+                <a:tc>
+                  <a:txBody>
+                    <a:bodyPr/>
+                    <a:lstStyle/>
+                    <a:p>
+                      <a:pPr latinLnBrk="1"/>
+                      <a:r>
+                        <a:rPr lang="en-US" altLang="ko-KR" sz="1400" dirty="0" smtClean="0"/>
+                        <a:t>“</a:t>
+                      </a:r>
+                      <a:r>
+                        <a:rPr lang="ko-KR" altLang="en-US" sz="1400" dirty="0" smtClean="0"/>
+                        <a:t>아이디 또는 비밀번호를 확인해주시기 바랍니다</a:t>
+                      </a:r>
+                      <a:r>
+                        <a:rPr lang="en-US" altLang="ko-KR" sz="1400" dirty="0" smtClean="0"/>
+                        <a:t>＂</a:t>
+                      </a:r>
+                      <a:endParaRPr lang="ko-KR" altLang="en-US" sz="1400" dirty="0"/>
+                    </a:p>
+                  </a:txBody>
+                  <a:tcPr/>
+                </a:tc>
+                <a:tc>
+                  <a:txBody>
+                    <a:bodyPr/>
+                    <a:lstStyle/>
+                    <a:p>
+                      <a:pPr latinLnBrk="1"/>
+                      <a:endParaRPr lang="ko-KR" altLang="en-US" sz="1400" dirty="0"/>
+                    </a:p>
+                  </a:txBody>
+                  <a:tcPr/>
+                </a:tc>
+                <a:extLst>
+                  <a:ext uri="{0D108BD9-81ED-4DB2-BD59-A6C34878D82A}">
+                    <a16:rowId xmlns:a16="http://schemas.microsoft.com/office/drawing/2014/main" val="3780631364"/>
+                  </a:ext>
+                </a:extLst>
+              </a:tr>
+              <a:tr h="327716">
+                <a:tc>
+                  <a:txBody>
+                    <a:bodyPr/>
+                    <a:lstStyle/>
+                    <a:p>
+                      <a:pPr latinLnBrk="1"/>
+                      <a:r>
+                        <a:rPr lang="en-US" altLang="ko-KR" sz="1400" dirty="0"/>
+                        <a:t>3</a:t>
+                      </a:r>
+                      <a:endParaRPr lang="ko-KR" altLang="en-US" sz="1400" dirty="0"/>
+                    </a:p>
+                  </a:txBody>
+                  <a:tcPr/>
+                </a:tc>
+                <a:tc>
+                  <a:txBody>
+                    <a:bodyPr/>
+                    <a:lstStyle/>
+                    <a:p>
+                      <a:pPr latinLnBrk="1"/>
+                      <a:r>
+                        <a:rPr lang="ko-KR" altLang="en-US" sz="1400" dirty="0" smtClean="0"/>
+                        <a:t>반려동물이 특정 위치에 오랜 시간 머묾</a:t>
+                      </a:r>
+                      <a:endParaRPr lang="ko-KR" altLang="en-US" sz="1400" dirty="0"/>
+                    </a:p>
+                  </a:txBody>
+                  <a:tcPr/>
+                </a:tc>
+                <a:tc>
+                  <a:txBody>
+                    <a:bodyPr/>
+                    <a:lstStyle/>
+                    <a:p>
+                      <a:pPr latinLnBrk="1"/>
+                      <a:r>
+                        <a:rPr lang="en-US" altLang="ko-KR" sz="1400" dirty="0" smtClean="0"/>
+                        <a:t>“</a:t>
+                      </a:r>
+                      <a:r>
+                        <a:rPr lang="ko-KR" altLang="en-US" sz="1400" dirty="0" smtClean="0"/>
+                        <a:t>반려동물이 부릅니다</a:t>
+                      </a:r>
+                      <a:r>
+                        <a:rPr lang="en-US" altLang="ko-KR" sz="1400" dirty="0" smtClean="0"/>
+                        <a:t>!”</a:t>
+                      </a:r>
+                      <a:endParaRPr lang="ko-KR" altLang="en-US" sz="1400" dirty="0"/>
+                    </a:p>
+                  </a:txBody>
+                  <a:tcPr/>
+                </a:tc>
+                <a:tc>
+                  <a:txBody>
+                    <a:bodyPr/>
+                    <a:lstStyle/>
+                    <a:p>
+                      <a:pPr latinLnBrk="1"/>
+                      <a:r>
+                        <a:rPr lang="ko-KR" altLang="en-US" sz="1400" dirty="0" smtClean="0"/>
+                        <a:t>반려동물 </a:t>
+                      </a:r>
+                      <a:r>
+                        <a:rPr lang="ko-KR" altLang="en-US" sz="1400" dirty="0" err="1" smtClean="0"/>
+                        <a:t>능동알림</a:t>
+                      </a:r>
+                      <a:r>
+                        <a:rPr lang="ko-KR" altLang="en-US" sz="1400" dirty="0" smtClean="0"/>
+                        <a:t> 전송</a:t>
+                      </a:r>
+                      <a:r>
+                        <a:rPr lang="en-US" altLang="ko-KR" sz="1400" dirty="0" smtClean="0"/>
+                        <a:t>(</a:t>
+                      </a:r>
+                      <a:r>
+                        <a:rPr lang="ko-KR" altLang="en-US" sz="1400" dirty="0" smtClean="0"/>
+                        <a:t>사용자 스마트폰으로</a:t>
+                      </a:r>
+                      <a:r>
+                        <a:rPr lang="en-US" altLang="ko-KR" sz="1400" dirty="0" smtClean="0"/>
+                        <a:t>)</a:t>
+                      </a:r>
+                      <a:endParaRPr lang="ko-KR" altLang="en-US" sz="1400" dirty="0"/>
+                    </a:p>
+                  </a:txBody>
+                  <a:tcPr/>
+                </a:tc>
+                <a:extLst>
+                  <a:ext uri="{0D108BD9-81ED-4DB2-BD59-A6C34878D82A}">
+                    <a16:rowId xmlns:a16="http://schemas.microsoft.com/office/drawing/2014/main" val="3646646237"/>
+                  </a:ext>
+                </a:extLst>
+              </a:tr>
+              <a:tr h="327716">
+                <a:tc>
+                  <a:txBody>
+                    <a:bodyPr/>
+                    <a:lstStyle/>
+                    <a:p>
+                      <a:pPr latinLnBrk="1"/>
+                      <a:r>
+                        <a:rPr lang="en-US" altLang="ko-KR" sz="1400" dirty="0"/>
+                        <a:t>4</a:t>
+                      </a:r>
+                      <a:endParaRPr lang="ko-KR" altLang="en-US" sz="1400" dirty="0"/>
+                    </a:p>
+                  </a:txBody>
+                  <a:tcPr/>
+                </a:tc>
+                <a:tc>
+                  <a:txBody>
+                    <a:bodyPr/>
+                    <a:lstStyle/>
+                    <a:p>
+                      <a:pPr latinLnBrk="1"/>
+                      <a:r>
+                        <a:rPr lang="ko-KR" altLang="en-US" sz="1400" dirty="0" smtClean="0"/>
+                        <a:t>사료 급여 결과 피드백</a:t>
+                      </a:r>
+                      <a:endParaRPr lang="ko-KR" altLang="en-US" sz="1400" dirty="0"/>
+                    </a:p>
+                  </a:txBody>
+                  <a:tcPr/>
+                </a:tc>
+                <a:tc>
+                  <a:txBody>
+                    <a:bodyPr/>
+                    <a:lstStyle/>
+                    <a:p>
+                      <a:pPr latinLnBrk="1"/>
+                      <a:r>
+                        <a:rPr lang="en-US" altLang="ko-KR" sz="1400" dirty="0" smtClean="0"/>
+                        <a:t>“</a:t>
+                      </a:r>
+                      <a:r>
+                        <a:rPr lang="ko-KR" altLang="en-US" sz="1400" dirty="0" smtClean="0"/>
+                        <a:t>사료 급여에 성공</a:t>
+                      </a:r>
+                      <a:r>
+                        <a:rPr lang="en-US" altLang="ko-KR" sz="1400" dirty="0" smtClean="0"/>
+                        <a:t>/</a:t>
+                      </a:r>
+                      <a:r>
+                        <a:rPr lang="ko-KR" altLang="en-US" sz="1400" dirty="0" smtClean="0"/>
+                        <a:t>실패했습니다</a:t>
+                      </a:r>
+                      <a:r>
+                        <a:rPr lang="en-US" altLang="ko-KR" sz="1400" dirty="0" smtClean="0"/>
+                        <a:t>”</a:t>
+                      </a:r>
+                      <a:endParaRPr lang="ko-KR" altLang="en-US" sz="1400" dirty="0"/>
+                    </a:p>
+                  </a:txBody>
+                  <a:tcPr/>
+                </a:tc>
+                <a:tc>
+                  <a:txBody>
+                    <a:bodyPr/>
+                    <a:lstStyle/>
+                    <a:p>
+                      <a:pPr latinLnBrk="1"/>
+                      <a:endParaRPr lang="ko-KR" altLang="en-US" sz="1400" dirty="0"/>
+                    </a:p>
+                  </a:txBody>
+                  <a:tcPr/>
+                </a:tc>
+                <a:extLst>
+                  <a:ext uri="{0D108BD9-81ED-4DB2-BD59-A6C34878D82A}">
+                    <a16:rowId xmlns:a16="http://schemas.microsoft.com/office/drawing/2014/main" val="1077918615"/>
+                  </a:ext>
+                </a:extLst>
+              </a:tr>
+              <a:tr h="327716">
+                <a:tc>
+                  <a:txBody>
+                    <a:bodyPr/>
+                    <a:lstStyle/>
+                    <a:p>
+                      <a:pPr latinLnBrk="1"/>
+                      <a:r>
+                        <a:rPr lang="en-US" altLang="ko-KR" sz="1400" dirty="0"/>
+                        <a:t>5</a:t>
+                      </a:r>
+                      <a:endParaRPr lang="ko-KR" altLang="en-US" sz="1400" dirty="0"/>
+                    </a:p>
+                  </a:txBody>
+                  <a:tcPr/>
+                </a:tc>
+                <a:tc>
+                  <a:txBody>
+                    <a:bodyPr/>
+                    <a:lstStyle/>
+                    <a:p>
+                      <a:pPr latinLnBrk="1"/>
+                      <a:endParaRPr lang="ko-KR" altLang="en-US" sz="1400" dirty="0"/>
+                    </a:p>
+                  </a:txBody>
+                  <a:tcPr/>
+                </a:tc>
+                <a:tc>
+                  <a:txBody>
+                    <a:bodyPr/>
+                    <a:lstStyle/>
+                    <a:p>
+                      <a:pPr latinLnBrk="1"/>
+                      <a:endParaRPr lang="ko-KR" altLang="en-US" sz="1400" dirty="0"/>
+                    </a:p>
+                  </a:txBody>
+                  <a:tcPr/>
+                </a:tc>
+                <a:tc>
+                  <a:txBody>
+                    <a:bodyPr/>
+                    <a:lstStyle/>
+                    <a:p>
+                      <a:pPr latinLnBrk="1"/>
+                      <a:endParaRPr lang="ko-KR" altLang="en-US" sz="1400" dirty="0"/>
+                    </a:p>
+                  </a:txBody>
+                  <a:tcPr/>
+                </a:tc>
+                <a:extLst>
+                  <a:ext uri="{0D108BD9-81ED-4DB2-BD59-A6C34878D82A}">
+                    <a16:rowId xmlns:a16="http://schemas.microsoft.com/office/drawing/2014/main" val="387124318"/>
+                  </a:ext>
+                </a:extLst>
+              </a:tr>
+              <a:tr h="327716">
+                <a:tc>
+                  <a:txBody>
+                    <a:bodyPr/>
+                    <a:lstStyle/>
+                    <a:p>
+                      <a:pPr latinLnBrk="1"/>
+                      <a:r>
+                        <a:rPr lang="en-US" altLang="ko-KR" sz="1400" dirty="0"/>
+                        <a:t>6</a:t>
+                      </a:r>
+                      <a:endParaRPr lang="ko-KR" altLang="en-US" sz="1400" dirty="0"/>
+                    </a:p>
+                  </a:txBody>
+                  <a:tcPr/>
+                </a:tc>
+                <a:tc>
+                  <a:txBody>
+                    <a:bodyPr/>
+                    <a:lstStyle/>
+                    <a:p>
+                      <a:pPr latinLnBrk="1"/>
+                      <a:endParaRPr lang="ko-KR" altLang="en-US" sz="1400" dirty="0"/>
+                    </a:p>
+                  </a:txBody>
+                  <a:tcPr/>
+                </a:tc>
+                <a:tc>
+                  <a:txBody>
+                    <a:bodyPr/>
+                    <a:lstStyle/>
+                    <a:p>
+                      <a:pPr latinLnBrk="1"/>
+                      <a:endParaRPr lang="ko-KR" altLang="en-US" sz="1400" dirty="0"/>
+                    </a:p>
+                  </a:txBody>
+                  <a:tcPr/>
+                </a:tc>
+                <a:tc>
+                  <a:txBody>
+                    <a:bodyPr/>
+                    <a:lstStyle/>
+                    <a:p>
+                      <a:pPr latinLnBrk="1"/>
+                      <a:endParaRPr lang="ko-KR" altLang="en-US" sz="1400" dirty="0"/>
+                    </a:p>
+                  </a:txBody>
+                  <a:tcPr/>
+                </a:tc>
+                <a:extLst>
+                  <a:ext uri="{0D108BD9-81ED-4DB2-BD59-A6C34878D82A}">
+                    <a16:rowId xmlns:a16="http://schemas.microsoft.com/office/drawing/2014/main" val="3075948501"/>
+                  </a:ext>
+                </a:extLst>
+              </a:tr>
+            </a:tbl>
+          </a:graphicData>
+        </a:graphic>
+      </p:graphicFrame>
+      <p:sp>
+        <p:nvSpPr>
+          <p:cNvPr id="4" name="제목 1">
+            <a:extLst>
+              <a:ext uri="{FF2B5EF4-FFF2-40B4-BE49-F238E27FC236}">
+                <a16:creationId xmlns:a16="http://schemas.microsoft.com/office/drawing/2014/main" id="{47864767-AC6F-412C-A047-E7EAECD9C5D0}"/>
+              </a:ext>
+            </a:extLst>
+          </p:cNvPr>
+          <p:cNvSpPr txBox="1">
+            <a:spLocks/>
+          </p:cNvSpPr>
+          <p:nvPr/>
+        </p:nvSpPr>
+        <p:spPr>
+          <a:xfrm>
+            <a:off x="0" y="0"/>
+            <a:ext cx="3611220" cy="543452"/>
+          </a:xfrm>
+          <a:prstGeom prst="rect">
+            <a:avLst/>
+          </a:prstGeom>
+        </p:spPr>
+        <p:txBody>
+          <a:bodyPr vert="horz" lIns="91440" tIns="45720" rIns="91440" bIns="45720" rtlCol="0" anchor="ctr">
+            <a:normAutofit/>
+          </a:bodyPr>
+          <a:lstStyle>
+            <a:lvl1pPr algn="l" defTabSz="914400" rtl="0" eaLnBrk="1" latinLnBrk="1" hangingPunct="1">
+              <a:lnSpc>
+                <a:spcPct val="90000"/>
+              </a:lnSpc>
+              <a:spcBef>
+                <a:spcPct val="0"/>
+              </a:spcBef>
+              <a:buNone/>
+              <a:defRPr sz="4400" kern="1200">
+                <a:solidFill>
+                  <a:schemeClr val="tx1"/>
+                </a:solidFill>
+                <a:latin typeface="+mj-lt"/>
+                <a:ea typeface="+mj-ea"/>
+                <a:cs typeface="+mj-cs"/>
+              </a:defRPr>
+            </a:lvl1pPr>
+          </a:lstStyle>
+          <a:p>
+            <a:r>
+              <a:rPr lang="ko-KR" altLang="en-US" sz="1800" dirty="0"/>
+              <a:t>설계 </a:t>
+            </a:r>
+            <a:r>
+              <a:rPr lang="en-US" altLang="ko-KR" sz="1800" dirty="0"/>
+              <a:t>– </a:t>
+            </a:r>
+            <a:r>
+              <a:rPr lang="ko-KR" altLang="en-US" sz="1800" dirty="0"/>
+              <a:t>유효성 검사</a:t>
+            </a:r>
+          </a:p>
+        </p:txBody>
+      </p:sp>
+    </p:spTree>
+    <p:extLst>
+      <p:ext uri="{BB962C8B-B14F-4D97-AF65-F5344CB8AC3E}">
+        <p14:creationId xmlns:p14="http://schemas.microsoft.com/office/powerpoint/2010/main" val="3080871177"/>
+      </p:ext>
+    </p:extLst>
+  </p:cSld>
+  <p:clrMapOvr>
+    <a:masterClrMapping/>
+  </p:clrMapOvr>
+  <p:timing>
+    <p:tnLst>
+      <p:par>
+        <p:cTn id="1" dur="indefinite" restart="never" nodeType="tmRoot"/>
+      </p:par>
+    </p:tnLst>
+  </p:timing>
 </p:sld>
 </file>
 
@@ -4104,6 +4772,13 @@
   <p:clrMapOvr>
     <a:masterClrMapping/>
   </p:clrMapOvr>
+  <p:timing>
+    <p:tnLst>
+      <p:par>
+        <p:cTn id="1" dur="indefinite" restart="never" nodeType="tmRoot"/>
+      </p:par>
+    </p:tnLst>
+  </p:timing>
 </p:sld>
 </file>
 
@@ -4140,14 +4815,14 @@
             <p:ph idx="1"/>
             <p:extLst>
               <p:ext uri="{D42A27DB-BD31-4B8C-83A1-F6EECF244321}">
-                <p14:modId xmlns:p14="http://schemas.microsoft.com/office/powerpoint/2010/main" val="2600796878"/>
+                <p14:modId xmlns:p14="http://schemas.microsoft.com/office/powerpoint/2010/main" val="740000480"/>
               </p:ext>
             </p:extLst>
           </p:nvPr>
         </p:nvGraphicFramePr>
         <p:xfrm>
           <a:off x="871451" y="543452"/>
-          <a:ext cx="10515600" cy="5591005"/>
+          <a:ext cx="10515600" cy="5868432"/>
         </p:xfrm>
         <a:graphic>
           <a:graphicData uri="http://schemas.openxmlformats.org/drawingml/2006/table">
@@ -4199,7 +4874,7 @@
                   </a:extLst>
                 </a:gridCol>
               </a:tblGrid>
-              <a:tr h="657727">
+              <a:tr h="412512">
                 <a:tc>
                   <a:txBody>
                     <a:bodyPr/>
@@ -4347,7 +5022,7 @@
                   </a:ext>
                 </a:extLst>
               </a:tr>
-              <a:tr h="879438">
+              <a:tr h="146573">
                 <a:tc>
                   <a:txBody>
                     <a:bodyPr/>
@@ -4402,6 +5077,10 @@
                     <a:lstStyle/>
                     <a:p>
                       <a:pPr latinLnBrk="1"/>
+                      <a:r>
+                        <a:rPr lang="en-US" altLang="ko-KR" sz="1600" dirty="0" err="1" smtClean="0"/>
+                        <a:t>MainSign</a:t>
+                      </a:r>
                       <a:endParaRPr lang="ko-KR" altLang="en-US" sz="1600" dirty="0"/>
                     </a:p>
                   </a:txBody>
@@ -4413,6 +5092,38 @@
                     <a:lstStyle/>
                     <a:p>
                       <a:pPr latinLnBrk="1"/>
+                      <a:r>
+                        <a:rPr lang="en-US" altLang="ko-KR" sz="1600" dirty="0" smtClean="0"/>
+                        <a:t>(</a:t>
+                      </a:r>
+                      <a:r>
+                        <a:rPr lang="ko-KR" altLang="en-US" sz="1600" dirty="0" smtClean="0"/>
+                        <a:t>로그인</a:t>
+                      </a:r>
+                      <a:r>
+                        <a:rPr lang="en-US" altLang="ko-KR" sz="1600" dirty="0" smtClean="0"/>
+                        <a:t>)</a:t>
+                      </a:r>
+                      <a:r>
+                        <a:rPr lang="ko-KR" altLang="en-US" sz="1600" dirty="0" smtClean="0"/>
+                        <a:t>메인 페이지에서 반려동물 상태 요약</a:t>
+                      </a:r>
+                      <a:r>
+                        <a:rPr lang="en-US" altLang="ko-KR" sz="1600" dirty="0" smtClean="0"/>
+                        <a:t>, </a:t>
+                      </a:r>
+                      <a:r>
+                        <a:rPr lang="ko-KR" altLang="en-US" sz="1600" dirty="0" smtClean="0"/>
+                        <a:t>알림 요약</a:t>
+                      </a:r>
+                      <a:r>
+                        <a:rPr lang="en-US" altLang="ko-KR" sz="1600" dirty="0" smtClean="0"/>
+                        <a:t>, </a:t>
+                      </a:r>
+                      <a:r>
+                        <a:rPr lang="ko-KR" altLang="en-US" sz="1600" dirty="0" smtClean="0"/>
+                        <a:t>최근 이벤트 정보를 통합 조회</a:t>
+                      </a:r>
                       <a:endParaRPr lang="ko-KR" altLang="en-US" sz="1600" dirty="0"/>
                     </a:p>
                   </a:txBody>
@@ -4435,7 +5146,120 @@
                   </a:ext>
                 </a:extLst>
               </a:tr>
-              <a:tr h="439719">
+              <a:tr h="561119">
+                <a:tc>
+                  <a:txBody>
+                    <a:bodyPr/>
+                    <a:lstStyle/>
+                    <a:p>
+                      <a:pPr latinLnBrk="1"/>
+                      <a:endParaRPr lang="ko-KR" altLang="en-US" sz="1600" dirty="0"/>
+                    </a:p>
+                  </a:txBody>
+                  <a:tcPr/>
+                </a:tc>
+                <a:tc>
+                  <a:txBody>
+                    <a:bodyPr/>
+                    <a:lstStyle/>
+                    <a:p>
+                      <a:pPr latinLnBrk="1"/>
+                      <a:r>
+                        <a:rPr lang="ko-KR" altLang="en-US" sz="1600" dirty="0" smtClean="0"/>
+                        <a:t>메인</a:t>
+                      </a:r>
+                      <a:r>
+                        <a:rPr lang="en-US" altLang="ko-KR" sz="1600" dirty="0" smtClean="0"/>
+                        <a:t>(</a:t>
+                      </a:r>
+                      <a:r>
+                        <a:rPr lang="ko-KR" altLang="en-US" sz="1600" dirty="0" err="1" smtClean="0"/>
+                        <a:t>비로그인</a:t>
+                      </a:r>
+                      <a:r>
+                        <a:rPr lang="en-US" altLang="ko-KR" sz="1600" dirty="0" smtClean="0"/>
+                        <a:t>)</a:t>
+                      </a:r>
+                      <a:endParaRPr lang="ko-KR" altLang="en-US" sz="1600" dirty="0"/>
+                    </a:p>
+                  </a:txBody>
+                  <a:tcPr/>
+                </a:tc>
+                <a:tc>
+                  <a:txBody>
+                    <a:bodyPr/>
+                    <a:lstStyle/>
+                    <a:p>
+                      <a:pPr latinLnBrk="1"/>
+                      <a:r>
+                        <a:rPr lang="en-US" altLang="ko-KR" sz="1600" dirty="0" smtClean="0"/>
+                        <a:t>PHC-MA-02</a:t>
+                      </a:r>
+                      <a:endParaRPr lang="ko-KR" altLang="en-US" sz="1600" dirty="0"/>
+                    </a:p>
+                  </a:txBody>
+                  <a:tcPr/>
+                </a:tc>
+                <a:tc>
+                  <a:txBody>
+                    <a:bodyPr/>
+                    <a:lstStyle/>
+                    <a:p>
+                      <a:pPr latinLnBrk="1"/>
+                      <a:r>
+                        <a:rPr lang="en-US" altLang="ko-KR" sz="1600" dirty="0" err="1" smtClean="0"/>
+                        <a:t>MainNonSign</a:t>
+                      </a:r>
+                      <a:endParaRPr lang="ko-KR" altLang="en-US" sz="1600" dirty="0"/>
+                    </a:p>
+                  </a:txBody>
+                  <a:tcPr/>
+                </a:tc>
+                <a:tc>
+                  <a:txBody>
+                    <a:bodyPr/>
+                    <a:lstStyle/>
+                    <a:p>
+                      <a:pPr latinLnBrk="1"/>
+                      <a:r>
+                        <a:rPr lang="ko-KR" altLang="en-US" sz="1600" dirty="0" err="1" smtClean="0"/>
+                        <a:t>비로그인</a:t>
+                      </a:r>
+                      <a:r>
+                        <a:rPr lang="ko-KR" altLang="en-US" sz="1600" dirty="0" smtClean="0"/>
+                        <a:t> 상태로</a:t>
+                      </a:r>
+                      <a:r>
+                        <a:rPr lang="en-US" altLang="ko-KR" sz="1600" dirty="0" smtClean="0"/>
+                        <a:t>, </a:t>
+                      </a:r>
+                      <a:r>
+                        <a:rPr lang="ko-KR" altLang="en-US" sz="1600" dirty="0" smtClean="0"/>
+                        <a:t>화면 표시 내용을 제한적으로 공개</a:t>
+                      </a:r>
+                      <a:endParaRPr lang="ko-KR" altLang="en-US" sz="1600" dirty="0"/>
+                    </a:p>
+                  </a:txBody>
+                  <a:tcPr/>
+                </a:tc>
+                <a:tc>
+                  <a:txBody>
+                    <a:bodyPr/>
+                    <a:lstStyle/>
+                    <a:p>
+                      <a:pPr latinLnBrk="1"/>
+                      <a:endParaRPr lang="ko-KR" altLang="en-US" sz="1600" dirty="0"/>
+                    </a:p>
+                  </a:txBody>
+                  <a:tcPr/>
+                </a:tc>
+                <a:extLst>
+                  <a:ext uri="{0D108BD9-81ED-4DB2-BD59-A6C34878D82A}">
+                    <a16:rowId xmlns:a16="http://schemas.microsoft.com/office/drawing/2014/main" val="2033447572"/>
+                  </a:ext>
+                </a:extLst>
+              </a:tr>
+              <a:tr h="439199">
                 <a:tc>
                   <a:txBody>
                     <a:bodyPr/>
@@ -4505,6 +5329,10 @@
                     <a:lstStyle/>
                     <a:p>
                       <a:pPr latinLnBrk="1"/>
+                      <a:r>
+                        <a:rPr lang="en-US" altLang="ko-KR" sz="1600" dirty="0" err="1" smtClean="0"/>
+                        <a:t>SignUp</a:t>
+                      </a:r>
                       <a:endParaRPr lang="ko-KR" altLang="en-US" sz="1600" dirty="0"/>
                     </a:p>
                   </a:txBody>
@@ -4608,6 +5436,10 @@
                     <a:lstStyle/>
                     <a:p>
                       <a:pPr latinLnBrk="1"/>
+                      <a:r>
+                        <a:rPr lang="en-US" altLang="ko-KR" sz="1600" dirty="0" err="1" smtClean="0"/>
+                        <a:t>SignIn</a:t>
+                      </a:r>
                       <a:endParaRPr lang="ko-KR" altLang="en-US" sz="1600" dirty="0"/>
                     </a:p>
                   </a:txBody>
@@ -4708,6 +5540,10 @@
                     <a:lstStyle/>
                     <a:p>
                       <a:pPr latinLnBrk="1"/>
+                      <a:r>
+                        <a:rPr lang="en-US" altLang="ko-KR" sz="1600" dirty="0" smtClean="0"/>
+                        <a:t>Landing</a:t>
+                      </a:r>
                       <a:endParaRPr lang="ko-KR" altLang="en-US" sz="1600" dirty="0"/>
                     </a:p>
                   </a:txBody>
@@ -5102,7 +5938,11 @@
                     <a:lstStyle/>
                     <a:p>
                       <a:pPr latinLnBrk="1"/>
-                      <a:endParaRPr lang="ko-KR" altLang="en-US" sz="1600"/>
+                      <a:r>
+                        <a:rPr lang="en-US" altLang="ko-KR" sz="1600" dirty="0" err="1" smtClean="0"/>
+                        <a:t>GAList</a:t>
+                      </a:r>
+                      <a:endParaRPr lang="ko-KR" altLang="en-US" sz="1600" dirty="0"/>
                     </a:p>
                   </a:txBody>
                   <a:tcPr/>
@@ -5205,7 +6045,11 @@
                     <a:lstStyle/>
                     <a:p>
                       <a:pPr latinLnBrk="1"/>
-                      <a:endParaRPr lang="ko-KR" altLang="en-US" sz="1600"/>
+                      <a:r>
+                        <a:rPr lang="en-US" altLang="ko-KR" sz="1600" dirty="0" err="1" smtClean="0"/>
+                        <a:t>GADetail</a:t>
+                      </a:r>
+                      <a:endParaRPr lang="ko-KR" altLang="en-US" sz="1600" dirty="0"/>
                     </a:p>
                   </a:txBody>
                   <a:tcPr/>
@@ -5314,6 +6158,13 @@
   <p:clrMapOvr>
     <a:masterClrMapping/>
   </p:clrMapOvr>
+  <p:timing>
+    <p:tnLst>
+      <p:par>
+        <p:cTn id="1" dur="indefinite" restart="never" nodeType="tmRoot"/>
+      </p:par>
+    </p:tnLst>
+  </p:timing>
 </p:sld>
 </file>
 
@@ -5350,7 +6201,7 @@
             <p:ph idx="1"/>
             <p:extLst>
               <p:ext uri="{D42A27DB-BD31-4B8C-83A1-F6EECF244321}">
-                <p14:modId xmlns:p14="http://schemas.microsoft.com/office/powerpoint/2010/main" val="1757945343"/>
+                <p14:modId xmlns:p14="http://schemas.microsoft.com/office/powerpoint/2010/main" val="3039334728"/>
               </p:ext>
             </p:extLst>
           </p:nvPr>
@@ -5624,6 +6475,10 @@
                     <a:lstStyle/>
                     <a:p>
                       <a:pPr latinLnBrk="1"/>
+                      <a:r>
+                        <a:rPr lang="en-US" altLang="ko-KR" sz="1600" dirty="0" err="1" smtClean="0"/>
+                        <a:t>PetMain</a:t>
+                      </a:r>
                       <a:endParaRPr lang="ko-KR" altLang="en-US" sz="1600" dirty="0"/>
                     </a:p>
                   </a:txBody>
@@ -5801,6 +6656,10 @@
                     <a:lstStyle/>
                     <a:p>
                       <a:pPr latinLnBrk="1"/>
+                      <a:r>
+                        <a:rPr lang="en-US" altLang="ko-KR" sz="1600" dirty="0" err="1" smtClean="0"/>
+                        <a:t>AlertRecord</a:t>
+                      </a:r>
                       <a:endParaRPr lang="ko-KR" altLang="en-US" sz="1600" dirty="0"/>
                     </a:p>
                   </a:txBody>
@@ -5857,9 +6716,10 @@
                     <a:p>
                       <a:pPr latinLnBrk="1"/>
                       <a:r>
-                        <a:rPr lang="ko-KR" altLang="en-US" sz="1600" dirty="0"/>
-                        <a:t>조치기로관리</a:t>
-                      </a:r>
+                        <a:rPr lang="ko-KR" altLang="en-US" sz="1600" dirty="0" smtClean="0"/>
+                        <a:t>조치기록관리</a:t>
+                      </a:r>
+                      <a:endParaRPr lang="ko-KR" altLang="en-US" sz="1600" dirty="0"/>
                     </a:p>
                   </a:txBody>
                   <a:tcPr/>
@@ -5905,6 +6765,10 @@
                     <a:lstStyle/>
                     <a:p>
                       <a:pPr latinLnBrk="1"/>
+                      <a:r>
+                        <a:rPr lang="en-US" altLang="ko-KR" sz="1600" dirty="0" err="1" smtClean="0"/>
+                        <a:t>ActionRecord</a:t>
+                      </a:r>
                       <a:endParaRPr lang="ko-KR" altLang="en-US" sz="1600" dirty="0"/>
                     </a:p>
                   </a:txBody>
@@ -6638,6 +7502,13 @@
   <p:clrMapOvr>
     <a:masterClrMapping/>
   </p:clrMapOvr>
+  <p:timing>
+    <p:tnLst>
+      <p:par>
+        <p:cTn id="1" dur="indefinite" restart="never" nodeType="tmRoot"/>
+      </p:par>
+    </p:tnLst>
+  </p:timing>
 </p:sld>
 </file>
 
@@ -6674,7 +7545,7 @@
             <p:ph idx="1"/>
             <p:extLst>
               <p:ext uri="{D42A27DB-BD31-4B8C-83A1-F6EECF244321}">
-                <p14:modId xmlns:p14="http://schemas.microsoft.com/office/powerpoint/2010/main" val="2486195092"/>
+                <p14:modId xmlns:p14="http://schemas.microsoft.com/office/powerpoint/2010/main" val="3053416339"/>
               </p:ext>
             </p:extLst>
           </p:nvPr>
@@ -6966,31 +7837,31 @@
                     <a:p>
                       <a:pPr latinLnBrk="1"/>
                       <a:r>
-                        <a:rPr lang="en-US" altLang="ko-KR" sz="1600" dirty="0"/>
+                        <a:rPr lang="en-US" altLang="ko-KR" sz="1600" dirty="0" smtClean="0"/>
                         <a:t>(</a:t>
                       </a:r>
                       <a:r>
-                        <a:rPr lang="ko-KR" altLang="en-US" sz="1600" dirty="0"/>
+                        <a:rPr lang="ko-KR" altLang="en-US" sz="1600" dirty="0" smtClean="0"/>
+                        <a:t>관리자</a:t>
+                      </a:r>
+                      <a:r>
+                        <a:rPr lang="en-US" altLang="ko-KR" sz="1600" dirty="0" smtClean="0"/>
+                        <a:t>, </a:t>
+                      </a:r>
+                      <a:r>
+                        <a:rPr lang="ko-KR" altLang="en-US" sz="1600" dirty="0" smtClean="0"/>
                         <a:t>일반사용자</a:t>
                       </a:r>
                       <a:r>
-                        <a:rPr lang="en-US" altLang="ko-KR" sz="1600" dirty="0"/>
+                        <a:rPr lang="en-US" altLang="ko-KR" sz="1600" dirty="0" smtClean="0"/>
                         <a:t>, </a:t>
                       </a:r>
                       <a:r>
-                        <a:rPr lang="ko-KR" altLang="en-US" sz="1600" dirty="0"/>
+                        <a:rPr lang="ko-KR" altLang="en-US" sz="1600" dirty="0" err="1" smtClean="0"/>
                         <a:t>휴면사용자</a:t>
                       </a:r>
                       <a:r>
-                        <a:rPr lang="en-US" altLang="ko-KR" sz="1600" dirty="0"/>
-                        <a:t>, </a:t>
-                      </a:r>
-                      <a:r>
-                        <a:rPr lang="ko-KR" altLang="en-US" sz="1600" dirty="0"/>
-                        <a:t>관리자</a:t>
-                      </a:r>
-                      <a:r>
-                        <a:rPr lang="en-US" altLang="ko-KR" sz="1600" dirty="0"/>
+                        <a:rPr lang="en-US" altLang="ko-KR" sz="1600" dirty="0" smtClean="0"/>
                         <a:t>)</a:t>
                       </a:r>
                       <a:endParaRPr lang="ko-KR" altLang="en-US" sz="1600" dirty="0"/>
@@ -7082,6 +7953,10 @@
                     <a:lstStyle/>
                     <a:p>
                       <a:pPr latinLnBrk="1"/>
+                      <a:r>
+                        <a:rPr lang="en-US" altLang="ko-KR" sz="1600" dirty="0" smtClean="0"/>
+                        <a:t>Simulation</a:t>
+                      </a:r>
                       <a:endParaRPr lang="ko-KR" altLang="en-US" sz="1600" dirty="0"/>
                     </a:p>
                   </a:txBody>
@@ -7629,6 +8504,13 @@
   <p:clrMapOvr>
     <a:masterClrMapping/>
   </p:clrMapOvr>
+  <p:timing>
+    <p:tnLst>
+      <p:par>
+        <p:cTn id="1" dur="indefinite" restart="never" nodeType="tmRoot"/>
+      </p:par>
+    </p:tnLst>
+  </p:timing>
 </p:sld>
 </file>
 
@@ -9114,6 +9996,13 @@
   <p:clrMapOvr>
     <a:masterClrMapping/>
   </p:clrMapOvr>
+  <p:timing>
+    <p:tnLst>
+      <p:par>
+        <p:cTn id="1" dur="indefinite" restart="never" nodeType="tmRoot"/>
+      </p:par>
+    </p:tnLst>
+  </p:timing>
 </p:sld>
 </file>
 
@@ -9150,7 +10039,7 @@
             <p:ph idx="1"/>
             <p:extLst>
               <p:ext uri="{D42A27DB-BD31-4B8C-83A1-F6EECF244321}">
-                <p14:modId xmlns:p14="http://schemas.microsoft.com/office/powerpoint/2010/main" val="2960478810"/>
+                <p14:modId xmlns:p14="http://schemas.microsoft.com/office/powerpoint/2010/main" val="1390263769"/>
               </p:ext>
             </p:extLst>
           </p:nvPr>
@@ -9322,11 +10211,11 @@
                         <a:t>지원언어는 한국어 </a:t>
                       </a:r>
                       <a:r>
-                        <a:rPr lang="en-US" altLang="ko-KR" dirty="0"/>
+                        <a:rPr lang="en-US" altLang="ko-KR" strike="dblStrike" baseline="0" dirty="0"/>
                         <a:t>/ </a:t>
                       </a:r>
                       <a:r>
-                        <a:rPr lang="ko-KR" altLang="en-US" dirty="0"/>
+                        <a:rPr lang="ko-KR" altLang="en-US" strike="dblStrike" baseline="0" dirty="0"/>
                         <a:t>영어</a:t>
                       </a:r>
                     </a:p>
@@ -9369,17 +10258,10 @@
                     <a:p>
                       <a:pPr latinLnBrk="1"/>
                       <a:r>
-                        <a:rPr lang="ko-KR" altLang="en-US" dirty="0" err="1"/>
-                        <a:t>입점매장</a:t>
-                      </a:r>
-                      <a:endParaRPr lang="en-US" altLang="ko-KR" dirty="0"/>
-                    </a:p>
-                    <a:p>
-                      <a:pPr latinLnBrk="1"/>
-                      <a:r>
-                        <a:rPr lang="ko-KR" altLang="en-US" dirty="0"/>
+                        <a:rPr lang="ko-KR" altLang="en-US" dirty="0" err="1" smtClean="0"/>
                         <a:t>위치지도</a:t>
                       </a:r>
+                      <a:endParaRPr lang="ko-KR" altLang="en-US" dirty="0"/>
                     </a:p>
                   </a:txBody>
                   <a:tcPr/>
@@ -9435,7 +10317,7 @@
                     <a:lstStyle/>
                     <a:p>
                       <a:pPr latinLnBrk="1"/>
-                      <a:endParaRPr lang="ko-KR" altLang="en-US"/>
+                      <a:endParaRPr lang="ko-KR" altLang="en-US" dirty="0"/>
                     </a:p>
                   </a:txBody>
                   <a:tcPr/>
@@ -9497,46 +10379,46 @@
                         <a:buChar char="-"/>
                       </a:pPr>
                       <a:r>
-                        <a:rPr lang="en-US" altLang="ko-KR" dirty="0"/>
+                        <a:rPr lang="en-US" altLang="ko-KR" strike="dblStrike" baseline="0" dirty="0"/>
                         <a:t>Case 1: </a:t>
                       </a:r>
                       <a:r>
-                        <a:rPr lang="en-US" altLang="ko-KR" dirty="0">
+                        <a:rPr lang="en-US" altLang="ko-KR" strike="dblStrike" baseline="0" dirty="0">
                           <a:sym typeface="Wingdings" panose="05000000000000000000" pitchFamily="2" charset="2"/>
                         </a:rPr>
                         <a:t>(+) + </a:t>
                       </a:r>
                       <a:r>
-                        <a:rPr lang="ko-KR" altLang="en-US" dirty="0">
+                        <a:rPr lang="ko-KR" altLang="en-US" strike="dblStrike" baseline="0" dirty="0">
                           <a:sym typeface="Wingdings" panose="05000000000000000000" pitchFamily="2" charset="2"/>
                         </a:rPr>
                         <a:t>국가코드 </a:t>
                       </a:r>
                       <a:r>
-                        <a:rPr lang="en-US" altLang="ko-KR" dirty="0">
+                        <a:rPr lang="en-US" altLang="ko-KR" strike="dblStrike" baseline="0" dirty="0">
                           <a:sym typeface="Wingdings" panose="05000000000000000000" pitchFamily="2" charset="2"/>
                         </a:rPr>
                         <a:t>+ </a:t>
                       </a:r>
                       <a:r>
-                        <a:rPr lang="ko-KR" altLang="en-US" dirty="0">
+                        <a:rPr lang="ko-KR" altLang="en-US" strike="dblStrike" baseline="0" dirty="0">
                           <a:sym typeface="Wingdings" panose="05000000000000000000" pitchFamily="2" charset="2"/>
                         </a:rPr>
                         <a:t>지역코드 </a:t>
                       </a:r>
                       <a:r>
-                        <a:rPr lang="en-US" altLang="ko-KR" dirty="0">
+                        <a:rPr lang="en-US" altLang="ko-KR" strike="dblStrike" baseline="0" dirty="0">
                           <a:sym typeface="Wingdings" panose="05000000000000000000" pitchFamily="2" charset="2"/>
                         </a:rPr>
                         <a:t>+ </a:t>
                       </a:r>
                       <a:r>
-                        <a:rPr lang="ko-KR" altLang="en-US" dirty="0">
+                        <a:rPr lang="ko-KR" altLang="en-US" strike="dblStrike" baseline="0" dirty="0">
                           <a:sym typeface="Wingdings" panose="05000000000000000000" pitchFamily="2" charset="2"/>
                         </a:rPr>
                         <a:t>폰 넘버</a:t>
                       </a:r>
-                      <a:endParaRPr lang="en-US" altLang="ko-KR" dirty="0">
+                      <a:endParaRPr lang="en-US" altLang="ko-KR" strike="dblStrike" baseline="0" dirty="0">
                         <a:sym typeface="Wingdings" panose="05000000000000000000" pitchFamily="2" charset="2"/>
                       </a:endParaRPr>
                     </a:p>
@@ -9634,14 +10516,14 @@
                         <a:buChar char="-"/>
                       </a:pPr>
                       <a:r>
-                        <a:rPr lang="en-US" altLang="ko-KR" dirty="0"/>
+                        <a:rPr lang="en-US" altLang="ko-KR" strike="dblStrike" baseline="0" dirty="0"/>
                         <a:t>ISO </a:t>
                       </a:r>
                       <a:r>
-                        <a:rPr lang="ko-KR" altLang="en-US" dirty="0"/>
+                        <a:rPr lang="ko-KR" altLang="en-US" strike="dblStrike" baseline="0" dirty="0"/>
                         <a:t>표준으로 진행</a:t>
                       </a:r>
-                      <a:endParaRPr lang="en-US" altLang="ko-KR" dirty="0"/>
+                      <a:endParaRPr lang="en-US" altLang="ko-KR" strike="dblStrike" baseline="0" dirty="0"/>
                     </a:p>
                     <a:p>
                       <a:pPr marL="285750" indent="-285750" latinLnBrk="1">
@@ -9649,30 +10531,30 @@
                         <a:buChar char="-"/>
                       </a:pPr>
                       <a:r>
-                        <a:rPr lang="en-US" altLang="ko-KR" dirty="0"/>
+                        <a:rPr lang="en-US" altLang="ko-KR" strike="dblStrike" baseline="0" dirty="0"/>
                         <a:t>Case</a:t>
                       </a:r>
                       <a:r>
-                        <a:rPr lang="ko-KR" altLang="en-US" dirty="0"/>
+                        <a:rPr lang="ko-KR" altLang="en-US" strike="dblStrike" baseline="0" dirty="0"/>
                         <a:t> </a:t>
                       </a:r>
                       <a:r>
-                        <a:rPr lang="en-US" altLang="ko-KR" dirty="0"/>
+                        <a:rPr lang="en-US" altLang="ko-KR" strike="dblStrike" baseline="0" dirty="0"/>
                         <a:t>1:</a:t>
                       </a:r>
                       <a:r>
-                        <a:rPr lang="ko-KR" altLang="en-US" dirty="0"/>
+                        <a:rPr lang="ko-KR" altLang="en-US" strike="dblStrike" baseline="0" dirty="0"/>
                         <a:t> 국가</a:t>
                       </a:r>
                       <a:r>
-                        <a:rPr lang="en-US" altLang="ko-KR" dirty="0"/>
+                        <a:rPr lang="en-US" altLang="ko-KR" strike="dblStrike" baseline="0" dirty="0"/>
                         <a:t>-</a:t>
                       </a:r>
                       <a:r>
-                        <a:rPr lang="ko-KR" altLang="en-US" dirty="0"/>
+                        <a:rPr lang="ko-KR" altLang="en-US" strike="dblStrike" baseline="0" dirty="0"/>
                         <a:t>통화명칭</a:t>
                       </a:r>
-                      <a:endParaRPr lang="en-US" altLang="ko-KR" dirty="0"/>
+                      <a:endParaRPr lang="en-US" altLang="ko-KR" strike="dblStrike" baseline="0" dirty="0"/>
                     </a:p>
                     <a:p>
                       <a:pPr marL="285750" indent="-285750" latinLnBrk="1">
@@ -9680,11 +10562,11 @@
                         <a:buChar char="-"/>
                       </a:pPr>
                       <a:r>
-                        <a:rPr lang="en-US" altLang="ko-KR" dirty="0"/>
+                        <a:rPr lang="en-US" altLang="ko-KR" strike="dblStrike" baseline="0" dirty="0"/>
                         <a:t>Case 2: </a:t>
                       </a:r>
                       <a:r>
-                        <a:rPr lang="ko-KR" altLang="en-US" dirty="0"/>
+                        <a:rPr lang="ko-KR" altLang="en-US" strike="dblStrike" baseline="0" dirty="0"/>
                         <a:t>국가</a:t>
                       </a:r>
                     </a:p>
@@ -9931,10 +10813,956 @@
   <p:clrMapOvr>
     <a:masterClrMapping/>
   </p:clrMapOvr>
+  <p:timing>
+    <p:tnLst>
+      <p:par>
+        <p:cTn id="1" dur="indefinite" restart="never" nodeType="tmRoot"/>
+      </p:par>
+    </p:tnLst>
+  </p:timing>
 </p:sld>
 </file>
 
 <file path=ppt/slides/slide8.xml><?xml version="1.0" encoding="utf-8"?>
+<p:sld xmlns:a="http://schemas.openxmlformats.org/drawingml/2006/main" xmlns:r="http://schemas.openxmlformats.org/officeDocument/2006/relationships" xmlns:p="http://schemas.openxmlformats.org/presentationml/2006/main">
+  <p:cSld>
+    <p:spTree>
+      <p:nvGrpSpPr>
+        <p:cNvPr id="1" name=""/>
+        <p:cNvGrpSpPr/>
+        <p:nvPr/>
+      </p:nvGrpSpPr>
+      <p:grpSpPr>
+        <a:xfrm>
+          <a:off x="0" y="0"/>
+          <a:ext cx="0" cy="0"/>
+          <a:chOff x="0" y="0"/>
+          <a:chExt cx="0" cy="0"/>
+        </a:xfrm>
+      </p:grpSpPr>
+      <p:graphicFrame>
+        <p:nvGraphicFramePr>
+          <p:cNvPr id="4" name="표 4">
+            <a:extLst>
+              <a:ext uri="{FF2B5EF4-FFF2-40B4-BE49-F238E27FC236}">
+                <a16:creationId xmlns:a16="http://schemas.microsoft.com/office/drawing/2014/main" id="{FB8D3F86-825C-4406-8BA9-3FB201B06D56}"/>
+              </a:ext>
+            </a:extLst>
+          </p:cNvPr>
+          <p:cNvGraphicFramePr>
+            <a:graphicFrameLocks noGrp="1"/>
+          </p:cNvGraphicFramePr>
+          <p:nvPr>
+            <p:ph idx="1"/>
+            <p:extLst>
+              <p:ext uri="{D42A27DB-BD31-4B8C-83A1-F6EECF244321}">
+                <p14:modId xmlns:p14="http://schemas.microsoft.com/office/powerpoint/2010/main" val="3979026917"/>
+              </p:ext>
+            </p:extLst>
+          </p:nvPr>
+        </p:nvGraphicFramePr>
+        <p:xfrm>
+          <a:off x="755073" y="529951"/>
+          <a:ext cx="10515603" cy="6065512"/>
+        </p:xfrm>
+        <a:graphic>
+          <a:graphicData uri="http://schemas.openxmlformats.org/drawingml/2006/table">
+            <a:tbl>
+              <a:tblPr firstRow="1" bandRow="1">
+                <a:tableStyleId>{F5AB1C69-6EDB-4FF4-983F-18BD219EF322}</a:tableStyleId>
+              </a:tblPr>
+              <a:tblGrid>
+                <a:gridCol w="1571625">
+                  <a:extLst>
+                    <a:ext uri="{9D8B030D-6E8A-4147-A177-3AD203B41FA5}">
+                      <a16:colId xmlns:a16="http://schemas.microsoft.com/office/drawing/2014/main" val="1883018740"/>
+                    </a:ext>
+                  </a:extLst>
+                </a:gridCol>
+                <a:gridCol w="2095500">
+                  <a:extLst>
+                    <a:ext uri="{9D8B030D-6E8A-4147-A177-3AD203B41FA5}">
+                      <a16:colId xmlns:a16="http://schemas.microsoft.com/office/drawing/2014/main" val="3510901609"/>
+                    </a:ext>
+                  </a:extLst>
+                </a:gridCol>
+                <a:gridCol w="5381626">
+                  <a:extLst>
+                    <a:ext uri="{9D8B030D-6E8A-4147-A177-3AD203B41FA5}">
+                      <a16:colId xmlns:a16="http://schemas.microsoft.com/office/drawing/2014/main" val="2756399835"/>
+                    </a:ext>
+                  </a:extLst>
+                </a:gridCol>
+                <a:gridCol w="1466852">
+                  <a:extLst>
+                    <a:ext uri="{9D8B030D-6E8A-4147-A177-3AD203B41FA5}">
+                      <a16:colId xmlns:a16="http://schemas.microsoft.com/office/drawing/2014/main" val="1190506336"/>
+                    </a:ext>
+                  </a:extLst>
+                </a:gridCol>
+              </a:tblGrid>
+              <a:tr h="262883">
+                <a:tc>
+                  <a:txBody>
+                    <a:bodyPr/>
+                    <a:lstStyle/>
+                    <a:p>
+                      <a:pPr algn="l" latinLnBrk="1"/>
+                      <a:r>
+                        <a:rPr lang="ko-KR" altLang="en-US" dirty="0" err="1"/>
+                        <a:t>대구분</a:t>
+                      </a:r>
+                      <a:endParaRPr lang="ko-KR" altLang="en-US" dirty="0"/>
+                    </a:p>
+                  </a:txBody>
+                  <a:tcPr/>
+                </a:tc>
+                <a:tc>
+                  <a:txBody>
+                    <a:bodyPr/>
+                    <a:lstStyle/>
+                    <a:p>
+                      <a:pPr algn="l" latinLnBrk="1"/>
+                      <a:r>
+                        <a:rPr lang="ko-KR" altLang="en-US" dirty="0" err="1"/>
+                        <a:t>중구분</a:t>
+                      </a:r>
+                      <a:endParaRPr lang="ko-KR" altLang="en-US" dirty="0"/>
+                    </a:p>
+                  </a:txBody>
+                  <a:tcPr/>
+                </a:tc>
+                <a:tc>
+                  <a:txBody>
+                    <a:bodyPr/>
+                    <a:lstStyle/>
+                    <a:p>
+                      <a:pPr algn="l" latinLnBrk="1"/>
+                      <a:r>
+                        <a:rPr lang="ko-KR" altLang="en-US" dirty="0"/>
+                        <a:t>설명</a:t>
+                      </a:r>
+                    </a:p>
+                  </a:txBody>
+                  <a:tcPr/>
+                </a:tc>
+                <a:tc>
+                  <a:txBody>
+                    <a:bodyPr/>
+                    <a:lstStyle/>
+                    <a:p>
+                      <a:pPr algn="l" latinLnBrk="1"/>
+                      <a:r>
+                        <a:rPr lang="ko-KR" altLang="en-US" dirty="0"/>
+                        <a:t>비고</a:t>
+                      </a:r>
+                    </a:p>
+                  </a:txBody>
+                  <a:tcPr/>
+                </a:tc>
+                <a:extLst>
+                  <a:ext uri="{0D108BD9-81ED-4DB2-BD59-A6C34878D82A}">
+                    <a16:rowId xmlns:a16="http://schemas.microsoft.com/office/drawing/2014/main" val="190463397"/>
+                  </a:ext>
+                </a:extLst>
+              </a:tr>
+              <a:tr h="1066265">
+                <a:tc rowSpan="2">
+                  <a:txBody>
+                    <a:bodyPr/>
+                    <a:lstStyle/>
+                    <a:p>
+                      <a:pPr latinLnBrk="1"/>
+                      <a:r>
+                        <a:rPr lang="en-US" altLang="ko-KR" dirty="0" smtClean="0"/>
+                        <a:t>UI/UX </a:t>
+                      </a:r>
+                      <a:r>
+                        <a:rPr lang="ko-KR" altLang="en-US" dirty="0" smtClean="0"/>
+                        <a:t>정책</a:t>
+                      </a:r>
+                      <a:endParaRPr lang="ko-KR" altLang="en-US" dirty="0"/>
+                    </a:p>
+                  </a:txBody>
+                  <a:tcPr/>
+                </a:tc>
+                <a:tc>
+                  <a:txBody>
+                    <a:bodyPr/>
+                    <a:lstStyle/>
+                    <a:p>
+                      <a:pPr latinLnBrk="1"/>
+                      <a:r>
+                        <a:rPr lang="ko-KR" altLang="en-US" dirty="0" smtClean="0"/>
+                        <a:t>해상도 기준</a:t>
+                      </a:r>
+                      <a:endParaRPr lang="ko-KR" altLang="en-US" dirty="0"/>
+                    </a:p>
+                  </a:txBody>
+                  <a:tcPr/>
+                </a:tc>
+                <a:tc>
+                  <a:txBody>
+                    <a:bodyPr/>
+                    <a:lstStyle/>
+                    <a:p>
+                      <a:pPr marL="0" indent="0" latinLnBrk="1">
+                        <a:buFontTx/>
+                        <a:buNone/>
+                      </a:pPr>
+                      <a:r>
+                        <a:rPr lang="ko-KR" altLang="en-US" dirty="0" smtClean="0"/>
+                        <a:t>모바일</a:t>
+                      </a:r>
+                      <a:r>
+                        <a:rPr lang="en-US" altLang="ko-KR" dirty="0" smtClean="0"/>
+                        <a:t>(iPhone</a:t>
+                      </a:r>
+                      <a:r>
+                        <a:rPr lang="en-US" altLang="ko-KR" baseline="0" dirty="0" smtClean="0"/>
+                        <a:t> 14, 393x852px)</a:t>
+                      </a:r>
+                      <a:r>
+                        <a:rPr lang="ko-KR" altLang="en-US" baseline="0" dirty="0" smtClean="0"/>
+                        <a:t>을 기본으로 하며</a:t>
+                      </a:r>
+                      <a:r>
+                        <a:rPr lang="en-US" altLang="ko-KR" baseline="0" dirty="0" smtClean="0"/>
+                        <a:t>, ??</a:t>
+                      </a:r>
+                      <a:r>
+                        <a:rPr lang="ko-KR" altLang="en-US" baseline="0" dirty="0" err="1" smtClean="0"/>
+                        <a:t>반응형</a:t>
+                      </a:r>
+                      <a:r>
+                        <a:rPr lang="ko-KR" altLang="en-US" baseline="0" dirty="0" smtClean="0"/>
+                        <a:t> 여부는 팀원의 결정에 따른다</a:t>
+                      </a:r>
+                      <a:r>
+                        <a:rPr lang="en-US" altLang="ko-KR" baseline="0" dirty="0" smtClean="0"/>
+                        <a:t>??</a:t>
+                      </a:r>
+                    </a:p>
+                    <a:p>
+                      <a:pPr marL="0" indent="0" latinLnBrk="1">
+                        <a:buFontTx/>
+                        <a:buNone/>
+                      </a:pPr>
+                      <a:r>
+                        <a:rPr lang="ko-KR" altLang="en-US" baseline="0" dirty="0" smtClean="0"/>
+                        <a:t>단</a:t>
+                      </a:r>
+                      <a:r>
+                        <a:rPr lang="en-US" altLang="ko-KR" baseline="0" dirty="0" smtClean="0"/>
+                        <a:t>, </a:t>
+                      </a:r>
+                      <a:r>
+                        <a:rPr lang="ko-KR" altLang="en-US" baseline="0" dirty="0" smtClean="0"/>
+                        <a:t>관리자 페이지는 예외적으로 </a:t>
+                      </a:r>
+                      <a:r>
+                        <a:rPr lang="ko-KR" altLang="en-US" baseline="0" dirty="0" err="1" smtClean="0"/>
+                        <a:t>데스크탑</a:t>
+                      </a:r>
+                      <a:r>
+                        <a:rPr lang="ko-KR" altLang="en-US" baseline="0" dirty="0" smtClean="0"/>
+                        <a:t> 전용 페이지로 구성한다</a:t>
+                      </a:r>
+                      <a:r>
+                        <a:rPr lang="en-US" altLang="ko-KR" baseline="0" dirty="0" smtClean="0"/>
+                        <a:t>.</a:t>
+                      </a:r>
+                      <a:endParaRPr lang="ko-KR" altLang="en-US" dirty="0"/>
+                    </a:p>
+                  </a:txBody>
+                  <a:tcPr/>
+                </a:tc>
+                <a:tc>
+                  <a:txBody>
+                    <a:bodyPr/>
+                    <a:lstStyle/>
+                    <a:p>
+                      <a:pPr latinLnBrk="1"/>
+                      <a:endParaRPr lang="ko-KR" altLang="en-US" dirty="0"/>
+                    </a:p>
+                  </a:txBody>
+                  <a:tcPr/>
+                </a:tc>
+                <a:extLst>
+                  <a:ext uri="{0D108BD9-81ED-4DB2-BD59-A6C34878D82A}">
+                    <a16:rowId xmlns:a16="http://schemas.microsoft.com/office/drawing/2014/main" val="219822250"/>
+                  </a:ext>
+                </a:extLst>
+              </a:tr>
+              <a:tr h="401247">
+                <a:tc vMerge="1">
+                  <a:txBody>
+                    <a:bodyPr/>
+                    <a:lstStyle/>
+                    <a:p>
+                      <a:pPr latinLnBrk="1"/>
+                      <a:endParaRPr lang="ko-KR" altLang="en-US" dirty="0"/>
+                    </a:p>
+                  </a:txBody>
+                  <a:tcPr/>
+                </a:tc>
+                <a:tc>
+                  <a:txBody>
+                    <a:bodyPr/>
+                    <a:lstStyle/>
+                    <a:p>
+                      <a:pPr latinLnBrk="1"/>
+                      <a:r>
+                        <a:rPr lang="ko-KR" altLang="en-US" dirty="0" err="1" smtClean="0"/>
+                        <a:t>톤앤매너</a:t>
+                      </a:r>
+                      <a:endParaRPr lang="ko-KR" altLang="en-US" dirty="0"/>
+                    </a:p>
+                  </a:txBody>
+                  <a:tcPr/>
+                </a:tc>
+                <a:tc>
+                  <a:txBody>
+                    <a:bodyPr/>
+                    <a:lstStyle/>
+                    <a:p>
+                      <a:pPr marL="0" indent="0" latinLnBrk="1">
+                        <a:buFontTx/>
+                        <a:buNone/>
+                      </a:pPr>
+                      <a:r>
+                        <a:rPr lang="ko-KR" altLang="en-US" dirty="0" smtClean="0"/>
+                        <a:t>메인 컬러와 서브 컬러</a:t>
+                      </a:r>
+                      <a:endParaRPr lang="en-US" altLang="ko-KR" dirty="0"/>
+                    </a:p>
+                  </a:txBody>
+                  <a:tcPr/>
+                </a:tc>
+                <a:tc>
+                  <a:txBody>
+                    <a:bodyPr/>
+                    <a:lstStyle/>
+                    <a:p>
+                      <a:pPr latinLnBrk="1"/>
+                      <a:endParaRPr lang="ko-KR" altLang="en-US"/>
+                    </a:p>
+                  </a:txBody>
+                  <a:tcPr/>
+                </a:tc>
+                <a:extLst>
+                  <a:ext uri="{0D108BD9-81ED-4DB2-BD59-A6C34878D82A}">
+                    <a16:rowId xmlns:a16="http://schemas.microsoft.com/office/drawing/2014/main" val="2656268589"/>
+                  </a:ext>
+                </a:extLst>
+              </a:tr>
+              <a:tr h="909385">
+                <a:tc>
+                  <a:txBody>
+                    <a:bodyPr/>
+                    <a:lstStyle/>
+                    <a:p>
+                      <a:pPr latinLnBrk="1"/>
+                      <a:r>
+                        <a:rPr lang="ko-KR" altLang="en-US" dirty="0" smtClean="0"/>
+                        <a:t>기술 및 개발 정책</a:t>
+                      </a:r>
+                      <a:endParaRPr lang="ko-KR" altLang="en-US" dirty="0"/>
+                    </a:p>
+                  </a:txBody>
+                  <a:tcPr/>
+                </a:tc>
+                <a:tc>
+                  <a:txBody>
+                    <a:bodyPr/>
+                    <a:lstStyle/>
+                    <a:p>
+                      <a:pPr latinLnBrk="1"/>
+                      <a:r>
+                        <a:rPr lang="ko-KR" altLang="en-US" dirty="0" smtClean="0"/>
+                        <a:t>기술 스택</a:t>
+                      </a:r>
+                      <a:endParaRPr lang="ko-KR" altLang="en-US" dirty="0"/>
+                    </a:p>
+                  </a:txBody>
+                  <a:tcPr/>
+                </a:tc>
+                <a:tc>
+                  <a:txBody>
+                    <a:bodyPr/>
+                    <a:lstStyle/>
+                    <a:p>
+                      <a:pPr marL="285750" indent="-285750" latinLnBrk="1">
+                        <a:buFontTx/>
+                        <a:buChar char="-"/>
+                      </a:pPr>
+                      <a:endParaRPr lang="en-US" altLang="ko-KR" dirty="0"/>
+                    </a:p>
+                  </a:txBody>
+                  <a:tcPr/>
+                </a:tc>
+                <a:tc>
+                  <a:txBody>
+                    <a:bodyPr/>
+                    <a:lstStyle/>
+                    <a:p>
+                      <a:pPr latinLnBrk="1"/>
+                      <a:endParaRPr lang="ko-KR" altLang="en-US" dirty="0"/>
+                    </a:p>
+                  </a:txBody>
+                  <a:tcPr/>
+                </a:tc>
+                <a:extLst>
+                  <a:ext uri="{0D108BD9-81ED-4DB2-BD59-A6C34878D82A}">
+                    <a16:rowId xmlns:a16="http://schemas.microsoft.com/office/drawing/2014/main" val="1790733710"/>
+                  </a:ext>
+                </a:extLst>
+              </a:tr>
+              <a:tr h="254397">
+                <a:tc rowSpan="2">
+                  <a:txBody>
+                    <a:bodyPr/>
+                    <a:lstStyle/>
+                    <a:p>
+                      <a:pPr latinLnBrk="1"/>
+                      <a:r>
+                        <a:rPr lang="ko-KR" altLang="en-US" dirty="0" smtClean="0"/>
+                        <a:t>협업</a:t>
+                      </a:r>
+                      <a:r>
+                        <a:rPr lang="en-US" altLang="ko-KR" dirty="0" smtClean="0"/>
+                        <a:t>/</a:t>
+                      </a:r>
+                      <a:r>
+                        <a:rPr lang="ko-KR" altLang="en-US" dirty="0" smtClean="0"/>
+                        <a:t>버전 </a:t>
+                      </a:r>
+                      <a:endParaRPr lang="en-US" altLang="ko-KR" dirty="0" smtClean="0"/>
+                    </a:p>
+                    <a:p>
+                      <a:pPr latinLnBrk="1"/>
+                      <a:r>
+                        <a:rPr lang="ko-KR" altLang="en-US" dirty="0" smtClean="0"/>
+                        <a:t>관리 정책</a:t>
+                      </a:r>
+                      <a:endParaRPr lang="ko-KR" altLang="en-US" dirty="0"/>
+                    </a:p>
+                  </a:txBody>
+                  <a:tcPr/>
+                </a:tc>
+                <a:tc>
+                  <a:txBody>
+                    <a:bodyPr/>
+                    <a:lstStyle/>
+                    <a:p>
+                      <a:pPr latinLnBrk="1"/>
+                      <a:r>
+                        <a:rPr lang="ko-KR" altLang="en-US" dirty="0" err="1" smtClean="0"/>
+                        <a:t>브랜치</a:t>
+                      </a:r>
+                      <a:endParaRPr lang="ko-KR" altLang="en-US" dirty="0"/>
+                    </a:p>
+                  </a:txBody>
+                  <a:tcPr/>
+                </a:tc>
+                <a:tc>
+                  <a:txBody>
+                    <a:bodyPr/>
+                    <a:lstStyle/>
+                    <a:p>
+                      <a:pPr marL="0" indent="0" latinLnBrk="1">
+                        <a:buFontTx/>
+                        <a:buNone/>
+                      </a:pPr>
+                      <a:r>
+                        <a:rPr lang="en-US" altLang="ko-KR" dirty="0" smtClean="0"/>
+                        <a:t>GitHub</a:t>
+                      </a:r>
+                      <a:r>
+                        <a:rPr lang="ko-KR" altLang="en-US" baseline="0" dirty="0" smtClean="0"/>
+                        <a:t> 활용</a:t>
+                      </a:r>
+                      <a:endParaRPr lang="en-US" altLang="ko-KR" baseline="0" dirty="0" smtClean="0"/>
+                    </a:p>
+                  </a:txBody>
+                  <a:tcPr/>
+                </a:tc>
+                <a:tc>
+                  <a:txBody>
+                    <a:bodyPr/>
+                    <a:lstStyle/>
+                    <a:p>
+                      <a:pPr latinLnBrk="1"/>
+                      <a:endParaRPr lang="ko-KR" altLang="en-US" dirty="0"/>
+                    </a:p>
+                  </a:txBody>
+                  <a:tcPr/>
+                </a:tc>
+                <a:extLst>
+                  <a:ext uri="{0D108BD9-81ED-4DB2-BD59-A6C34878D82A}">
+                    <a16:rowId xmlns:a16="http://schemas.microsoft.com/office/drawing/2014/main" val="3224787731"/>
+                  </a:ext>
+                </a:extLst>
+              </a:tr>
+              <a:tr h="212833">
+                <a:tc vMerge="1">
+                  <a:txBody>
+                    <a:bodyPr/>
+                    <a:lstStyle/>
+                    <a:p>
+                      <a:pPr latinLnBrk="1"/>
+                      <a:endParaRPr lang="ko-KR" altLang="en-US" dirty="0"/>
+                    </a:p>
+                  </a:txBody>
+                  <a:tcPr/>
+                </a:tc>
+                <a:tc>
+                  <a:txBody>
+                    <a:bodyPr/>
+                    <a:lstStyle/>
+                    <a:p>
+                      <a:r>
+                        <a:rPr lang="ko-KR" altLang="en-US" dirty="0" smtClean="0"/>
+                        <a:t>문서 관리</a:t>
+                      </a:r>
+                      <a:endParaRPr lang="ko-KR" altLang="en-US" dirty="0"/>
+                    </a:p>
+                  </a:txBody>
+                  <a:tcPr/>
+                </a:tc>
+                <a:tc>
+                  <a:txBody>
+                    <a:bodyPr/>
+                    <a:lstStyle/>
+                    <a:p>
+                      <a:r>
+                        <a:rPr lang="ko-KR" altLang="en-US" dirty="0" smtClean="0"/>
+                        <a:t>모든 회의록과 일정 관리는 </a:t>
+                      </a:r>
+                      <a:r>
+                        <a:rPr lang="en-US" altLang="ko-KR" dirty="0" smtClean="0"/>
+                        <a:t>Notion</a:t>
+                      </a:r>
+                      <a:r>
+                        <a:rPr lang="ko-KR" altLang="en-US" dirty="0" smtClean="0"/>
+                        <a:t>을 통해 공유하며</a:t>
+                      </a:r>
+                      <a:r>
+                        <a:rPr lang="en-US" altLang="ko-KR" dirty="0" smtClean="0"/>
+                        <a:t>, </a:t>
+                      </a:r>
+                      <a:r>
+                        <a:rPr lang="ko-KR" altLang="en-US" dirty="0" smtClean="0"/>
+                        <a:t>최종 산출물은 </a:t>
+                      </a:r>
+                      <a:r>
+                        <a:rPr lang="en-US" altLang="ko-KR" dirty="0" smtClean="0"/>
+                        <a:t>GitHub</a:t>
+                      </a:r>
+                      <a:r>
+                        <a:rPr lang="ko-KR" altLang="en-US" dirty="0" smtClean="0"/>
+                        <a:t>에 정리</a:t>
+                      </a:r>
+                      <a:endParaRPr lang="ko-KR" altLang="en-US" dirty="0"/>
+                    </a:p>
+                  </a:txBody>
+                  <a:tcPr/>
+                </a:tc>
+                <a:tc>
+                  <a:txBody>
+                    <a:bodyPr/>
+                    <a:lstStyle/>
+                    <a:p>
+                      <a:pPr latinLnBrk="1"/>
+                      <a:endParaRPr lang="ko-KR" altLang="en-US" dirty="0"/>
+                    </a:p>
+                  </a:txBody>
+                  <a:tcPr/>
+                </a:tc>
+                <a:extLst>
+                  <a:ext uri="{0D108BD9-81ED-4DB2-BD59-A6C34878D82A}">
+                    <a16:rowId xmlns:a16="http://schemas.microsoft.com/office/drawing/2014/main" val="444222853"/>
+                  </a:ext>
+                </a:extLst>
+              </a:tr>
+              <a:tr h="487153">
+                <a:tc>
+                  <a:txBody>
+                    <a:bodyPr/>
+                    <a:lstStyle/>
+                    <a:p>
+                      <a:pPr latinLnBrk="1"/>
+                      <a:r>
+                        <a:rPr lang="ko-KR" altLang="en-US" dirty="0" smtClean="0"/>
+                        <a:t>인증 및 권한</a:t>
+                      </a:r>
+                      <a:endParaRPr lang="ko-KR" altLang="en-US" dirty="0"/>
+                    </a:p>
+                  </a:txBody>
+                  <a:tcPr/>
+                </a:tc>
+                <a:tc>
+                  <a:txBody>
+                    <a:bodyPr/>
+                    <a:lstStyle/>
+                    <a:p>
+                      <a:pPr latinLnBrk="1"/>
+                      <a:r>
+                        <a:rPr lang="ko-KR" altLang="en-US" dirty="0" smtClean="0"/>
+                        <a:t>권한 분리</a:t>
+                      </a:r>
+                      <a:endParaRPr lang="ko-KR" altLang="en-US" dirty="0"/>
+                    </a:p>
+                  </a:txBody>
+                  <a:tcPr/>
+                </a:tc>
+                <a:tc>
+                  <a:txBody>
+                    <a:bodyPr/>
+                    <a:lstStyle/>
+                    <a:p>
+                      <a:pPr latinLnBrk="1"/>
+                      <a:r>
+                        <a:rPr lang="en-US" altLang="ko-KR" dirty="0" smtClean="0"/>
+                        <a:t>Admin(</a:t>
+                      </a:r>
+                      <a:r>
+                        <a:rPr lang="ko-KR" altLang="en-US" dirty="0" smtClean="0"/>
+                        <a:t>관리자</a:t>
+                      </a:r>
+                      <a:r>
+                        <a:rPr lang="en-US" altLang="ko-KR" dirty="0" smtClean="0"/>
+                        <a:t>):</a:t>
+                      </a:r>
+                      <a:r>
+                        <a:rPr lang="en-US" altLang="ko-KR" baseline="0" dirty="0" smtClean="0"/>
+                        <a:t> </a:t>
+                      </a:r>
+                      <a:r>
+                        <a:rPr lang="ko-KR" altLang="en-US" baseline="0" dirty="0" smtClean="0"/>
+                        <a:t>관리 담당자 배정</a:t>
+                      </a:r>
+                      <a:endParaRPr lang="en-US" altLang="ko-KR" baseline="0" dirty="0" smtClean="0"/>
+                    </a:p>
+                    <a:p>
+                      <a:pPr latinLnBrk="1"/>
+                      <a:r>
+                        <a:rPr lang="en-US" altLang="ko-KR" dirty="0" smtClean="0"/>
+                        <a:t>User(</a:t>
+                      </a:r>
+                      <a:r>
+                        <a:rPr lang="ko-KR" altLang="en-US" dirty="0" smtClean="0"/>
+                        <a:t>일반 사용자</a:t>
+                      </a:r>
+                      <a:r>
+                        <a:rPr lang="en-US" altLang="ko-KR" dirty="0" smtClean="0"/>
+                        <a:t>): </a:t>
+                      </a:r>
+                      <a:r>
+                        <a:rPr lang="ko-KR" altLang="en-US" dirty="0" smtClean="0"/>
+                        <a:t>서비스 이용 및 피드백 제공</a:t>
+                      </a:r>
+                      <a:endParaRPr lang="en-US" altLang="ko-KR" dirty="0" smtClean="0"/>
+                    </a:p>
+                    <a:p>
+                      <a:pPr latinLnBrk="1"/>
+                      <a:r>
+                        <a:rPr lang="en-US" altLang="ko-KR" dirty="0" smtClean="0"/>
+                        <a:t>Inactive(</a:t>
+                      </a:r>
+                      <a:r>
+                        <a:rPr lang="ko-KR" altLang="en-US" dirty="0" smtClean="0"/>
+                        <a:t>휴면 사용자</a:t>
+                      </a:r>
+                      <a:r>
+                        <a:rPr lang="en-US" altLang="ko-KR" dirty="0" smtClean="0"/>
+                        <a:t>): </a:t>
+                      </a:r>
+                      <a:r>
+                        <a:rPr lang="ko-KR" altLang="en-US" dirty="0" smtClean="0"/>
+                        <a:t>장기 </a:t>
+                      </a:r>
+                      <a:r>
+                        <a:rPr lang="ko-KR" altLang="en-US" dirty="0" err="1" smtClean="0"/>
+                        <a:t>미사용자</a:t>
+                      </a:r>
+                      <a:endParaRPr lang="ko-KR" altLang="en-US" dirty="0"/>
+                    </a:p>
+                  </a:txBody>
+                  <a:tcPr/>
+                </a:tc>
+                <a:tc>
+                  <a:txBody>
+                    <a:bodyPr/>
+                    <a:lstStyle/>
+                    <a:p>
+                      <a:pPr latinLnBrk="1"/>
+                      <a:endParaRPr lang="ko-KR" altLang="en-US"/>
+                    </a:p>
+                  </a:txBody>
+                  <a:tcPr/>
+                </a:tc>
+                <a:extLst>
+                  <a:ext uri="{0D108BD9-81ED-4DB2-BD59-A6C34878D82A}">
+                    <a16:rowId xmlns:a16="http://schemas.microsoft.com/office/drawing/2014/main" val="3046030164"/>
+                  </a:ext>
+                </a:extLst>
+              </a:tr>
+              <a:tr h="196207">
+                <a:tc rowSpan="2">
+                  <a:txBody>
+                    <a:bodyPr/>
+                    <a:lstStyle/>
+                    <a:p>
+                      <a:pPr latinLnBrk="1"/>
+                      <a:r>
+                        <a:rPr lang="ko-KR" altLang="en-US" dirty="0" smtClean="0"/>
+                        <a:t>데이터 보관 정책</a:t>
+                      </a:r>
+                      <a:endParaRPr lang="ko-KR" altLang="en-US" dirty="0"/>
+                    </a:p>
+                  </a:txBody>
+                  <a:tcPr/>
+                </a:tc>
+                <a:tc>
+                  <a:txBody>
+                    <a:bodyPr/>
+                    <a:lstStyle/>
+                    <a:p>
+                      <a:pPr latinLnBrk="1"/>
+                      <a:r>
+                        <a:rPr lang="ko-KR" altLang="en-US" dirty="0" smtClean="0"/>
+                        <a:t>로그 보존 기간</a:t>
+                      </a:r>
+                      <a:endParaRPr lang="ko-KR" altLang="en-US" dirty="0"/>
+                    </a:p>
+                  </a:txBody>
+                  <a:tcPr/>
+                </a:tc>
+                <a:tc>
+                  <a:txBody>
+                    <a:bodyPr/>
+                    <a:lstStyle/>
+                    <a:p>
+                      <a:pPr marL="0" indent="0" latinLnBrk="1">
+                        <a:buFontTx/>
+                        <a:buNone/>
+                      </a:pPr>
+                      <a:r>
+                        <a:rPr lang="ko-KR" altLang="en-US" dirty="0" smtClean="0"/>
+                        <a:t>영상 데이터</a:t>
+                      </a:r>
+                      <a:r>
+                        <a:rPr lang="en-US" altLang="ko-KR" dirty="0" smtClean="0"/>
+                        <a:t>(</a:t>
+                      </a:r>
+                      <a:r>
+                        <a:rPr lang="en-US" altLang="ko-KR" dirty="0" err="1" smtClean="0"/>
+                        <a:t>media_log</a:t>
+                      </a:r>
+                      <a:r>
+                        <a:rPr lang="en-US" altLang="ko-KR" dirty="0" smtClean="0"/>
+                        <a:t>)</a:t>
+                      </a:r>
+                      <a:r>
+                        <a:rPr lang="ko-KR" altLang="en-US" dirty="0" smtClean="0"/>
+                        <a:t>는 용량 관리를 위해 </a:t>
+                      </a:r>
+                      <a:r>
+                        <a:rPr lang="en-US" altLang="ko-KR" dirty="0" smtClean="0"/>
+                        <a:t>7</a:t>
+                      </a:r>
+                      <a:r>
+                        <a:rPr lang="ko-KR" altLang="en-US" dirty="0" smtClean="0"/>
+                        <a:t>일간</a:t>
+                      </a:r>
+                      <a:r>
+                        <a:rPr lang="en-US" altLang="ko-KR" dirty="0" smtClean="0"/>
+                        <a:t>(?) </a:t>
+                      </a:r>
+                      <a:r>
+                        <a:rPr lang="ko-KR" altLang="en-US" dirty="0" smtClean="0"/>
+                        <a:t>보관 후 자동 삭제</a:t>
+                      </a:r>
+                      <a:endParaRPr lang="en-US" altLang="ko-KR" dirty="0"/>
+                    </a:p>
+                  </a:txBody>
+                  <a:tcPr/>
+                </a:tc>
+                <a:tc>
+                  <a:txBody>
+                    <a:bodyPr/>
+                    <a:lstStyle/>
+                    <a:p>
+                      <a:pPr latinLnBrk="1"/>
+                      <a:endParaRPr lang="ko-KR" altLang="en-US" dirty="0"/>
+                    </a:p>
+                  </a:txBody>
+                  <a:tcPr/>
+                </a:tc>
+                <a:extLst>
+                  <a:ext uri="{0D108BD9-81ED-4DB2-BD59-A6C34878D82A}">
+                    <a16:rowId xmlns:a16="http://schemas.microsoft.com/office/drawing/2014/main" val="3564140594"/>
+                  </a:ext>
+                </a:extLst>
+              </a:tr>
+              <a:tr h="354346">
+                <a:tc vMerge="1">
+                  <a:txBody>
+                    <a:bodyPr/>
+                    <a:lstStyle/>
+                    <a:p>
+                      <a:pPr latinLnBrk="1"/>
+                      <a:endParaRPr lang="ko-KR" altLang="en-US" dirty="0"/>
+                    </a:p>
+                  </a:txBody>
+                  <a:tcPr/>
+                </a:tc>
+                <a:tc>
+                  <a:txBody>
+                    <a:bodyPr/>
+                    <a:lstStyle/>
+                    <a:p>
+                      <a:pPr latinLnBrk="1"/>
+                      <a:r>
+                        <a:rPr lang="ko-KR" altLang="en-US" dirty="0" smtClean="0"/>
+                        <a:t>개인정보 처리</a:t>
+                      </a:r>
+                      <a:endParaRPr lang="ko-KR" altLang="en-US" dirty="0"/>
+                    </a:p>
+                  </a:txBody>
+                  <a:tcPr/>
+                </a:tc>
+                <a:tc>
+                  <a:txBody>
+                    <a:bodyPr/>
+                    <a:lstStyle/>
+                    <a:p>
+                      <a:pPr marL="0" indent="0" latinLnBrk="1">
+                        <a:buFontTx/>
+                        <a:buNone/>
+                      </a:pPr>
+                      <a:r>
+                        <a:rPr lang="ko-KR" altLang="en-US" dirty="0" smtClean="0"/>
+                        <a:t>반려동물 주인의 정보는 암호화 하여 저장하며</a:t>
+                      </a:r>
+                      <a:r>
+                        <a:rPr lang="en-US" altLang="ko-KR" dirty="0" smtClean="0"/>
+                        <a:t>, </a:t>
+                      </a:r>
+                      <a:r>
+                        <a:rPr lang="ko-KR" altLang="en-US" dirty="0" smtClean="0"/>
+                        <a:t>로그아웃 시 세션을 즉시 만료</a:t>
+                      </a:r>
+                      <a:endParaRPr lang="en-US" altLang="ko-KR" dirty="0"/>
+                    </a:p>
+                  </a:txBody>
+                  <a:tcPr/>
+                </a:tc>
+                <a:tc>
+                  <a:txBody>
+                    <a:bodyPr/>
+                    <a:lstStyle/>
+                    <a:p>
+                      <a:pPr latinLnBrk="1"/>
+                      <a:endParaRPr lang="ko-KR" altLang="en-US" dirty="0"/>
+                    </a:p>
+                  </a:txBody>
+                  <a:tcPr/>
+                </a:tc>
+                <a:extLst>
+                  <a:ext uri="{0D108BD9-81ED-4DB2-BD59-A6C34878D82A}">
+                    <a16:rowId xmlns:a16="http://schemas.microsoft.com/office/drawing/2014/main" val="514856114"/>
+                  </a:ext>
+                </a:extLst>
+              </a:tr>
+            </a:tbl>
+          </a:graphicData>
+        </a:graphic>
+      </p:graphicFrame>
+      <p:sp>
+        <p:nvSpPr>
+          <p:cNvPr id="5" name="제목 1">
+            <a:extLst>
+              <a:ext uri="{FF2B5EF4-FFF2-40B4-BE49-F238E27FC236}">
+                <a16:creationId xmlns:a16="http://schemas.microsoft.com/office/drawing/2014/main" id="{47864767-AC6F-412C-A047-E7EAECD9C5D0}"/>
+              </a:ext>
+            </a:extLst>
+          </p:cNvPr>
+          <p:cNvSpPr txBox="1">
+            <a:spLocks/>
+          </p:cNvSpPr>
+          <p:nvPr/>
+        </p:nvSpPr>
+        <p:spPr>
+          <a:xfrm>
+            <a:off x="0" y="0"/>
+            <a:ext cx="3611220" cy="543452"/>
+          </a:xfrm>
+          <a:prstGeom prst="rect">
+            <a:avLst/>
+          </a:prstGeom>
+        </p:spPr>
+        <p:txBody>
+          <a:bodyPr vert="horz" lIns="91440" tIns="45720" rIns="91440" bIns="45720" rtlCol="0" anchor="ctr">
+            <a:normAutofit/>
+          </a:bodyPr>
+          <a:lstStyle>
+            <a:lvl1pPr algn="l" defTabSz="914400" rtl="0" eaLnBrk="1" latinLnBrk="1" hangingPunct="1">
+              <a:lnSpc>
+                <a:spcPct val="90000"/>
+              </a:lnSpc>
+              <a:spcBef>
+                <a:spcPct val="0"/>
+              </a:spcBef>
+              <a:buNone/>
+              <a:defRPr sz="4400" kern="1200">
+                <a:solidFill>
+                  <a:schemeClr val="tx1"/>
+                </a:solidFill>
+                <a:latin typeface="+mj-lt"/>
+                <a:ea typeface="+mj-ea"/>
+                <a:cs typeface="+mj-cs"/>
+              </a:defRPr>
+            </a:lvl1pPr>
+          </a:lstStyle>
+          <a:p>
+            <a:r>
+              <a:rPr lang="ko-KR" altLang="en-US" sz="1800" dirty="0"/>
+              <a:t>설계 </a:t>
+            </a:r>
+            <a:r>
+              <a:rPr lang="en-US" altLang="ko-KR" sz="1800" dirty="0"/>
+              <a:t>– </a:t>
+            </a:r>
+            <a:r>
+              <a:rPr lang="ko-KR" altLang="en-US" sz="1800" dirty="0"/>
+              <a:t>정책</a:t>
+            </a:r>
+          </a:p>
+        </p:txBody>
+      </p:sp>
+    </p:spTree>
+    <p:extLst>
+      <p:ext uri="{BB962C8B-B14F-4D97-AF65-F5344CB8AC3E}">
+        <p14:creationId xmlns:p14="http://schemas.microsoft.com/office/powerpoint/2010/main" val="890247751"/>
+      </p:ext>
+    </p:extLst>
+  </p:cSld>
+  <p:clrMapOvr>
+    <a:masterClrMapping/>
+  </p:clrMapOvr>
+  <p:timing>
+    <p:tnLst>
+      <p:par>
+        <p:cTn id="1" dur="indefinite" restart="never" nodeType="tmRoot"/>
+      </p:par>
+    </p:tnLst>
+  </p:timing>
+</p:sld>
+</file>
+
+<file path=ppt/slides/slide9.xml><?xml version="1.0" encoding="utf-8"?>
 <p:sld xmlns:a="http://schemas.openxmlformats.org/drawingml/2006/main" xmlns:r="http://schemas.openxmlformats.org/officeDocument/2006/relationships" xmlns:p="http://schemas.openxmlformats.org/presentationml/2006/main">
   <p:cSld>
     <p:spTree>
@@ -11641,555 +13469,13 @@
   <p:clrMapOvr>
     <a:masterClrMapping/>
   </p:clrMapOvr>
-</p:sld>
-</file>
-
-<file path=ppt/slides/slide9.xml><?xml version="1.0" encoding="utf-8"?>
-<p:sld xmlns:a="http://schemas.openxmlformats.org/drawingml/2006/main" xmlns:r="http://schemas.openxmlformats.org/officeDocument/2006/relationships" xmlns:p="http://schemas.openxmlformats.org/presentationml/2006/main">
-  <p:cSld>
-    <p:spTree>
-      <p:nvGrpSpPr>
-        <p:cNvPr id="1" name=""/>
-        <p:cNvGrpSpPr/>
-        <p:nvPr/>
-      </p:nvGrpSpPr>
-      <p:grpSpPr>
-        <a:xfrm>
-          <a:off x="0" y="0"/>
-          <a:ext cx="0" cy="0"/>
-          <a:chOff x="0" y="0"/>
-          <a:chExt cx="0" cy="0"/>
-        </a:xfrm>
-      </p:grpSpPr>
-      <p:graphicFrame>
-        <p:nvGraphicFramePr>
-          <p:cNvPr id="5" name="표 4">
-            <a:extLst>
-              <a:ext uri="{FF2B5EF4-FFF2-40B4-BE49-F238E27FC236}">
-                <a16:creationId xmlns:a16="http://schemas.microsoft.com/office/drawing/2014/main" id="{44D6DE18-1C9C-43CB-82E9-B019349A75C2}"/>
-              </a:ext>
-            </a:extLst>
-          </p:cNvPr>
-          <p:cNvGraphicFramePr>
-            <a:graphicFrameLocks noGrp="1"/>
-          </p:cNvGraphicFramePr>
-          <p:nvPr>
-            <p:extLst>
-              <p:ext uri="{D42A27DB-BD31-4B8C-83A1-F6EECF244321}">
-                <p14:modId xmlns:p14="http://schemas.microsoft.com/office/powerpoint/2010/main" val="3410237119"/>
-              </p:ext>
-            </p:extLst>
-          </p:nvPr>
-        </p:nvGraphicFramePr>
-        <p:xfrm>
-          <a:off x="1411288" y="1660107"/>
-          <a:ext cx="9369424" cy="2271096"/>
-        </p:xfrm>
-        <a:graphic>
-          <a:graphicData uri="http://schemas.openxmlformats.org/drawingml/2006/table">
-            <a:tbl>
-              <a:tblPr firstRow="1" bandRow="1">
-                <a:tableStyleId>{5C22544A-7EE6-4342-B048-85BDC9FD1C3A}</a:tableStyleId>
-              </a:tblPr>
-              <a:tblGrid>
-                <a:gridCol w="2342356">
-                  <a:extLst>
-                    <a:ext uri="{9D8B030D-6E8A-4147-A177-3AD203B41FA5}">
-                      <a16:colId xmlns:a16="http://schemas.microsoft.com/office/drawing/2014/main" val="574304036"/>
-                    </a:ext>
-                  </a:extLst>
-                </a:gridCol>
-                <a:gridCol w="2342356">
-                  <a:extLst>
-                    <a:ext uri="{9D8B030D-6E8A-4147-A177-3AD203B41FA5}">
-                      <a16:colId xmlns:a16="http://schemas.microsoft.com/office/drawing/2014/main" val="537019085"/>
-                    </a:ext>
-                  </a:extLst>
-                </a:gridCol>
-                <a:gridCol w="2342356">
-                  <a:extLst>
-                    <a:ext uri="{9D8B030D-6E8A-4147-A177-3AD203B41FA5}">
-                      <a16:colId xmlns:a16="http://schemas.microsoft.com/office/drawing/2014/main" val="1538042651"/>
-                    </a:ext>
-                  </a:extLst>
-                </a:gridCol>
-                <a:gridCol w="2342356">
-                  <a:extLst>
-                    <a:ext uri="{9D8B030D-6E8A-4147-A177-3AD203B41FA5}">
-                      <a16:colId xmlns:a16="http://schemas.microsoft.com/office/drawing/2014/main" val="2670803437"/>
-                    </a:ext>
-                  </a:extLst>
-                </a:gridCol>
-              </a:tblGrid>
-              <a:tr h="207365">
-                <a:tc>
-                  <a:txBody>
-                    <a:bodyPr/>
-                    <a:lstStyle/>
-                    <a:p>
-                      <a:pPr latinLnBrk="1"/>
-                      <a:r>
-                        <a:rPr lang="ko-KR" altLang="en-US" sz="1400" dirty="0"/>
-                        <a:t>번호</a:t>
-                      </a:r>
-                    </a:p>
-                  </a:txBody>
-                  <a:tcPr/>
-                </a:tc>
-                <a:tc>
-                  <a:txBody>
-                    <a:bodyPr/>
-                    <a:lstStyle/>
-                    <a:p>
-                      <a:pPr latinLnBrk="1"/>
-                      <a:r>
-                        <a:rPr lang="ko-KR" altLang="en-US" sz="1400" dirty="0"/>
-                        <a:t>상황</a:t>
-                      </a:r>
-                    </a:p>
-                  </a:txBody>
-                  <a:tcPr/>
-                </a:tc>
-                <a:tc>
-                  <a:txBody>
-                    <a:bodyPr/>
-                    <a:lstStyle/>
-                    <a:p>
-                      <a:pPr latinLnBrk="1"/>
-                      <a:r>
-                        <a:rPr lang="ko-KR" altLang="en-US" sz="1400" dirty="0"/>
-                        <a:t>문구</a:t>
-                      </a:r>
-                    </a:p>
-                  </a:txBody>
-                  <a:tcPr/>
-                </a:tc>
-                <a:tc>
-                  <a:txBody>
-                    <a:bodyPr/>
-                    <a:lstStyle/>
-                    <a:p>
-                      <a:pPr latinLnBrk="1"/>
-                      <a:r>
-                        <a:rPr lang="ko-KR" altLang="en-US" sz="1400" dirty="0"/>
-                        <a:t>처리 시나리오</a:t>
-                      </a:r>
-                    </a:p>
-                  </a:txBody>
-                  <a:tcPr/>
-                </a:tc>
-                <a:extLst>
-                  <a:ext uri="{0D108BD9-81ED-4DB2-BD59-A6C34878D82A}">
-                    <a16:rowId xmlns:a16="http://schemas.microsoft.com/office/drawing/2014/main" val="4121971312"/>
-                  </a:ext>
-                </a:extLst>
-              </a:tr>
-              <a:tr h="327716">
-                <a:tc>
-                  <a:txBody>
-                    <a:bodyPr/>
-                    <a:lstStyle/>
-                    <a:p>
-                      <a:pPr latinLnBrk="1"/>
-                      <a:r>
-                        <a:rPr lang="en-US" altLang="ko-KR" sz="1400" dirty="0"/>
-                        <a:t>1</a:t>
-                      </a:r>
-                      <a:endParaRPr lang="ko-KR" altLang="en-US" sz="1400" dirty="0"/>
-                    </a:p>
-                  </a:txBody>
-                  <a:tcPr/>
-                </a:tc>
-                <a:tc>
-                  <a:txBody>
-                    <a:bodyPr/>
-                    <a:lstStyle/>
-                    <a:p>
-                      <a:pPr latinLnBrk="1"/>
-                      <a:endParaRPr lang="ko-KR" altLang="en-US" sz="1400" dirty="0"/>
-                    </a:p>
-                  </a:txBody>
-                  <a:tcPr/>
-                </a:tc>
-                <a:tc>
-                  <a:txBody>
-                    <a:bodyPr/>
-                    <a:lstStyle/>
-                    <a:p>
-                      <a:pPr latinLnBrk="1"/>
-                      <a:endParaRPr lang="ko-KR" altLang="en-US" sz="1400" dirty="0"/>
-                    </a:p>
-                  </a:txBody>
-                  <a:tcPr/>
-                </a:tc>
-                <a:tc>
-                  <a:txBody>
-                    <a:bodyPr/>
-                    <a:lstStyle/>
-                    <a:p>
-                      <a:pPr latinLnBrk="1"/>
-                      <a:endParaRPr lang="ko-KR" altLang="en-US" sz="1400" dirty="0"/>
-                    </a:p>
-                  </a:txBody>
-                  <a:tcPr/>
-                </a:tc>
-                <a:extLst>
-                  <a:ext uri="{0D108BD9-81ED-4DB2-BD59-A6C34878D82A}">
-                    <a16:rowId xmlns:a16="http://schemas.microsoft.com/office/drawing/2014/main" val="4277118500"/>
-                  </a:ext>
-                </a:extLst>
-              </a:tr>
-              <a:tr h="327716">
-                <a:tc>
-                  <a:txBody>
-                    <a:bodyPr/>
-                    <a:lstStyle/>
-                    <a:p>
-                      <a:pPr latinLnBrk="1"/>
-                      <a:r>
-                        <a:rPr lang="en-US" altLang="ko-KR" sz="1400" dirty="0"/>
-                        <a:t>2</a:t>
-                      </a:r>
-                      <a:endParaRPr lang="ko-KR" altLang="en-US" sz="1400" dirty="0"/>
-                    </a:p>
-                  </a:txBody>
-                  <a:tcPr/>
-                </a:tc>
-                <a:tc>
-                  <a:txBody>
-                    <a:bodyPr/>
-                    <a:lstStyle/>
-                    <a:p>
-                      <a:pPr latinLnBrk="1"/>
-                      <a:endParaRPr lang="ko-KR" altLang="en-US" sz="1400" dirty="0"/>
-                    </a:p>
-                  </a:txBody>
-                  <a:tcPr/>
-                </a:tc>
-                <a:tc>
-                  <a:txBody>
-                    <a:bodyPr/>
-                    <a:lstStyle/>
-                    <a:p>
-                      <a:pPr latinLnBrk="1"/>
-                      <a:endParaRPr lang="ko-KR" altLang="en-US" sz="1400" dirty="0"/>
-                    </a:p>
-                  </a:txBody>
-                  <a:tcPr/>
-                </a:tc>
-                <a:tc>
-                  <a:txBody>
-                    <a:bodyPr/>
-                    <a:lstStyle/>
-                    <a:p>
-                      <a:pPr latinLnBrk="1"/>
-                      <a:endParaRPr lang="ko-KR" altLang="en-US" sz="1400" dirty="0"/>
-                    </a:p>
-                  </a:txBody>
-                  <a:tcPr/>
-                </a:tc>
-                <a:extLst>
-                  <a:ext uri="{0D108BD9-81ED-4DB2-BD59-A6C34878D82A}">
-                    <a16:rowId xmlns:a16="http://schemas.microsoft.com/office/drawing/2014/main" val="3780631364"/>
-                  </a:ext>
-                </a:extLst>
-              </a:tr>
-              <a:tr h="327716">
-                <a:tc>
-                  <a:txBody>
-                    <a:bodyPr/>
-                    <a:lstStyle/>
-                    <a:p>
-                      <a:pPr latinLnBrk="1"/>
-                      <a:r>
-                        <a:rPr lang="en-US" altLang="ko-KR" sz="1400" dirty="0"/>
-                        <a:t>3</a:t>
-                      </a:r>
-                      <a:endParaRPr lang="ko-KR" altLang="en-US" sz="1400" dirty="0"/>
-                    </a:p>
-                  </a:txBody>
-                  <a:tcPr/>
-                </a:tc>
-                <a:tc>
-                  <a:txBody>
-                    <a:bodyPr/>
-                    <a:lstStyle/>
-                    <a:p>
-                      <a:pPr latinLnBrk="1"/>
-                      <a:endParaRPr lang="ko-KR" altLang="en-US" sz="1400" dirty="0"/>
-                    </a:p>
-                  </a:txBody>
-                  <a:tcPr/>
-                </a:tc>
-                <a:tc>
-                  <a:txBody>
-                    <a:bodyPr/>
-                    <a:lstStyle/>
-                    <a:p>
-                      <a:pPr latinLnBrk="1"/>
-                      <a:endParaRPr lang="ko-KR" altLang="en-US" sz="1400" dirty="0"/>
-                    </a:p>
-                  </a:txBody>
-                  <a:tcPr/>
-                </a:tc>
-                <a:tc>
-                  <a:txBody>
-                    <a:bodyPr/>
-                    <a:lstStyle/>
-                    <a:p>
-                      <a:pPr latinLnBrk="1"/>
-                      <a:endParaRPr lang="ko-KR" altLang="en-US" sz="1400" dirty="0"/>
-                    </a:p>
-                  </a:txBody>
-                  <a:tcPr/>
-                </a:tc>
-                <a:extLst>
-                  <a:ext uri="{0D108BD9-81ED-4DB2-BD59-A6C34878D82A}">
-                    <a16:rowId xmlns:a16="http://schemas.microsoft.com/office/drawing/2014/main" val="3646646237"/>
-                  </a:ext>
-                </a:extLst>
-              </a:tr>
-              <a:tr h="327716">
-                <a:tc>
-                  <a:txBody>
-                    <a:bodyPr/>
-                    <a:lstStyle/>
-                    <a:p>
-                      <a:pPr latinLnBrk="1"/>
-                      <a:r>
-                        <a:rPr lang="en-US" altLang="ko-KR" sz="1400" dirty="0"/>
-                        <a:t>4</a:t>
-                      </a:r>
-                      <a:endParaRPr lang="ko-KR" altLang="en-US" sz="1400" dirty="0"/>
-                    </a:p>
-                  </a:txBody>
-                  <a:tcPr/>
-                </a:tc>
-                <a:tc>
-                  <a:txBody>
-                    <a:bodyPr/>
-                    <a:lstStyle/>
-                    <a:p>
-                      <a:pPr latinLnBrk="1"/>
-                      <a:endParaRPr lang="ko-KR" altLang="en-US" sz="1400" dirty="0"/>
-                    </a:p>
-                  </a:txBody>
-                  <a:tcPr/>
-                </a:tc>
-                <a:tc>
-                  <a:txBody>
-                    <a:bodyPr/>
-                    <a:lstStyle/>
-                    <a:p>
-                      <a:pPr latinLnBrk="1"/>
-                      <a:endParaRPr lang="ko-KR" altLang="en-US" sz="1400" dirty="0"/>
-                    </a:p>
-                  </a:txBody>
-                  <a:tcPr/>
-                </a:tc>
-                <a:tc>
-                  <a:txBody>
-                    <a:bodyPr/>
-                    <a:lstStyle/>
-                    <a:p>
-                      <a:pPr latinLnBrk="1"/>
-                      <a:endParaRPr lang="ko-KR" altLang="en-US" sz="1400" dirty="0"/>
-                    </a:p>
-                  </a:txBody>
-                  <a:tcPr/>
-                </a:tc>
-                <a:extLst>
-                  <a:ext uri="{0D108BD9-81ED-4DB2-BD59-A6C34878D82A}">
-                    <a16:rowId xmlns:a16="http://schemas.microsoft.com/office/drawing/2014/main" val="1077918615"/>
-                  </a:ext>
-                </a:extLst>
-              </a:tr>
-              <a:tr h="327716">
-                <a:tc>
-                  <a:txBody>
-                    <a:bodyPr/>
-                    <a:lstStyle/>
-                    <a:p>
-                      <a:pPr latinLnBrk="1"/>
-                      <a:r>
-                        <a:rPr lang="en-US" altLang="ko-KR" sz="1400" dirty="0"/>
-                        <a:t>5</a:t>
-                      </a:r>
-                      <a:endParaRPr lang="ko-KR" altLang="en-US" sz="1400" dirty="0"/>
-                    </a:p>
-                  </a:txBody>
-                  <a:tcPr/>
-                </a:tc>
-                <a:tc>
-                  <a:txBody>
-                    <a:bodyPr/>
-                    <a:lstStyle/>
-                    <a:p>
-                      <a:pPr latinLnBrk="1"/>
-                      <a:endParaRPr lang="ko-KR" altLang="en-US" sz="1400" dirty="0"/>
-                    </a:p>
-                  </a:txBody>
-                  <a:tcPr/>
-                </a:tc>
-                <a:tc>
-                  <a:txBody>
-                    <a:bodyPr/>
-                    <a:lstStyle/>
-                    <a:p>
-                      <a:pPr latinLnBrk="1"/>
-                      <a:endParaRPr lang="ko-KR" altLang="en-US" sz="1400" dirty="0"/>
-                    </a:p>
-                  </a:txBody>
-                  <a:tcPr/>
-                </a:tc>
-                <a:tc>
-                  <a:txBody>
-                    <a:bodyPr/>
-                    <a:lstStyle/>
-                    <a:p>
-                      <a:pPr latinLnBrk="1"/>
-                      <a:endParaRPr lang="ko-KR" altLang="en-US" sz="1400" dirty="0"/>
-                    </a:p>
-                  </a:txBody>
-                  <a:tcPr/>
-                </a:tc>
-                <a:extLst>
-                  <a:ext uri="{0D108BD9-81ED-4DB2-BD59-A6C34878D82A}">
-                    <a16:rowId xmlns:a16="http://schemas.microsoft.com/office/drawing/2014/main" val="387124318"/>
-                  </a:ext>
-                </a:extLst>
-              </a:tr>
-              <a:tr h="327716">
-                <a:tc>
-                  <a:txBody>
-                    <a:bodyPr/>
-                    <a:lstStyle/>
-                    <a:p>
-                      <a:pPr latinLnBrk="1"/>
-                      <a:r>
-                        <a:rPr lang="en-US" altLang="ko-KR" sz="1400" dirty="0"/>
-                        <a:t>6</a:t>
-                      </a:r>
-                      <a:endParaRPr lang="ko-KR" altLang="en-US" sz="1400" dirty="0"/>
-                    </a:p>
-                  </a:txBody>
-                  <a:tcPr/>
-                </a:tc>
-                <a:tc>
-                  <a:txBody>
-                    <a:bodyPr/>
-                    <a:lstStyle/>
-                    <a:p>
-                      <a:pPr latinLnBrk="1"/>
-                      <a:endParaRPr lang="ko-KR" altLang="en-US" sz="1400" dirty="0"/>
-                    </a:p>
-                  </a:txBody>
-                  <a:tcPr/>
-                </a:tc>
-                <a:tc>
-                  <a:txBody>
-                    <a:bodyPr/>
-                    <a:lstStyle/>
-                    <a:p>
-                      <a:pPr latinLnBrk="1"/>
-                      <a:endParaRPr lang="ko-KR" altLang="en-US" sz="1400" dirty="0"/>
-                    </a:p>
-                  </a:txBody>
-                  <a:tcPr/>
-                </a:tc>
-                <a:tc>
-                  <a:txBody>
-                    <a:bodyPr/>
-                    <a:lstStyle/>
-                    <a:p>
-                      <a:pPr latinLnBrk="1"/>
-                      <a:endParaRPr lang="ko-KR" altLang="en-US" sz="1400" dirty="0"/>
-                    </a:p>
-                  </a:txBody>
-                  <a:tcPr/>
-                </a:tc>
-                <a:extLst>
-                  <a:ext uri="{0D108BD9-81ED-4DB2-BD59-A6C34878D82A}">
-                    <a16:rowId xmlns:a16="http://schemas.microsoft.com/office/drawing/2014/main" val="3075948501"/>
-                  </a:ext>
-                </a:extLst>
-              </a:tr>
-            </a:tbl>
-          </a:graphicData>
-        </a:graphic>
-      </p:graphicFrame>
-      <p:sp>
-        <p:nvSpPr>
-          <p:cNvPr id="4" name="제목 1">
-            <a:extLst>
-              <a:ext uri="{FF2B5EF4-FFF2-40B4-BE49-F238E27FC236}">
-                <a16:creationId xmlns:a16="http://schemas.microsoft.com/office/drawing/2014/main" id="{47864767-AC6F-412C-A047-E7EAECD9C5D0}"/>
-              </a:ext>
-            </a:extLst>
-          </p:cNvPr>
-          <p:cNvSpPr txBox="1">
-            <a:spLocks/>
-          </p:cNvSpPr>
-          <p:nvPr/>
-        </p:nvSpPr>
-        <p:spPr>
-          <a:xfrm>
-            <a:off x="0" y="0"/>
-            <a:ext cx="3611220" cy="543452"/>
-          </a:xfrm>
-          <a:prstGeom prst="rect">
-            <a:avLst/>
-          </a:prstGeom>
-        </p:spPr>
-        <p:txBody>
-          <a:bodyPr vert="horz" lIns="91440" tIns="45720" rIns="91440" bIns="45720" rtlCol="0" anchor="ctr">
-            <a:normAutofit/>
-          </a:bodyPr>
-          <a:lstStyle>
-            <a:lvl1pPr algn="l" defTabSz="914400" rtl="0" eaLnBrk="1" latinLnBrk="1" hangingPunct="1">
-              <a:lnSpc>
-                <a:spcPct val="90000"/>
-              </a:lnSpc>
-              <a:spcBef>
-                <a:spcPct val="0"/>
-              </a:spcBef>
-              <a:buNone/>
-              <a:defRPr sz="4400" kern="1200">
-                <a:solidFill>
-                  <a:schemeClr val="tx1"/>
-                </a:solidFill>
-                <a:latin typeface="+mj-lt"/>
-                <a:ea typeface="+mj-ea"/>
-                <a:cs typeface="+mj-cs"/>
-              </a:defRPr>
-            </a:lvl1pPr>
-          </a:lstStyle>
-          <a:p>
-            <a:r>
-              <a:rPr lang="ko-KR" altLang="en-US" sz="1800" dirty="0"/>
-              <a:t>설계 </a:t>
-            </a:r>
-            <a:r>
-              <a:rPr lang="en-US" altLang="ko-KR" sz="1800" dirty="0"/>
-              <a:t>– </a:t>
-            </a:r>
-            <a:r>
-              <a:rPr lang="ko-KR" altLang="en-US" sz="1800" dirty="0"/>
-              <a:t>유효성 검사</a:t>
-            </a:r>
-          </a:p>
-        </p:txBody>
-      </p:sp>
-    </p:spTree>
-    <p:extLst>
-      <p:ext uri="{BB962C8B-B14F-4D97-AF65-F5344CB8AC3E}">
-        <p14:creationId xmlns:p14="http://schemas.microsoft.com/office/powerpoint/2010/main" val="3080871177"/>
-      </p:ext>
-    </p:extLst>
-  </p:cSld>
-  <p:clrMapOvr>
-    <a:masterClrMapping/>
-  </p:clrMapOvr>
+  <p:timing>
+    <p:tnLst>
+      <p:par>
+        <p:cTn id="1" dur="indefinite" restart="never" nodeType="tmRoot"/>
+      </p:par>
+    </p:tnLst>
+  </p:timing>
 </p:sld>
 </file>
 
